--- a/slides/talk.pptx
+++ b/slides/talk.pptx
@@ -25,6 +25,7 @@
     <p:sldId id="273" r:id="rId25"/>
     <p:sldId id="274" r:id="rId26"/>
     <p:sldId id="275" r:id="rId27"/>
+    <p:sldId id="276" r:id="rId28"/>
   </p:sldIdLst>
   <p:sldSz cx="12191695" cy="6858000" type="screen4x3"/>
   <p:notesSz cx="6858000" cy="9144000"/>
@@ -1156,7 +1157,17 @@
           <a:lstStyle/>
           <a:p>
             <a:r>
-              <a:t>Финальная мысль: очередь задач — простая идея с дорогими деталями. Сложность не в том, чтобы поставить задачу, а в том, чтобы пережить повтор, падение и перезапуск.</a:t>
+              <a:t>Этот слайд — про то, что с собственным результатом нужно спорить. Диагностика воспроизводима: bench/diagnose.py, раздел «Аудит» в docs/experiment.md.</a:t>
+            </a:r>
+          </a:p>
+          <a:p>
+            <a:r>
+              <a:t>Данные матрицы при этом корректны: во всех 135 прогонах число живых воркеров совпало с ожидаемым, разброс между повторами — 2 % (максимум 17 %), то есть меньше сравниваемых разниц.</a:t>
+            </a:r>
+          </a:p>
+          <a:p>
+            <a:r>
+              <a:t>Что стоило сделать иначе: отдельный Redis под результаты и метрики, прогон без событий Flower, сравнение при одинаковых гарантиях публикации.</a:t>
             </a:r>
           </a:p>
         </p:txBody>
@@ -1226,7 +1237,7 @@
           <a:lstStyle/>
           <a:p>
             <a:r>
-              <a:t>Готовые ответы: почему TaskBackend, почему acks_late, почему две очереди, почему результат в файлах, почему Redis для демо и RabbitMQ для продакшена.</a:t>
+              <a:t>Финальная мысль: очередь задач — простая идея с дорогими деталями. Сложность не в том, чтобы поставить задачу, а в том, чтобы пережить повтор, падение и перезапуск.</a:t>
             </a:r>
           </a:p>
         </p:txBody>
@@ -1297,6 +1308,76 @@
           <a:p>
             <a:r>
               <a:t>Competing consumers — ключ к горизонтальному масштабированию: чтобы добавить мощности, не нужно менять код, нужно поднять ещё один процесс-воркер. Это и покажу в эксперименте (1 → 2 → 4 воркера).</a:t>
+            </a:r>
+          </a:p>
+        </p:txBody>
+      </p:sp>
+      <p:sp>
+        <p:nvSpPr>
+          <p:cNvPr id="4" name="Slide Number Placeholder 3"/>
+          <p:cNvSpPr>
+            <a:spLocks noGrp="1"/>
+          </p:cNvSpPr>
+          <p:nvPr>
+            <p:ph type="sldNum" idx="5" sz="quarter"/>
+          </p:nvPr>
+        </p:nvSpPr>
+        <p:spPr/>
+      </p:sp>
+    </p:spTree>
+  </p:cSld>
+  <p:clrMapOvr>
+    <a:masterClrMapping/>
+  </p:clrMapOvr>
+</p:notes>
+</file>
+
+<file path=ppt/notesSlides/notesSlide20.xml><?xml version="1.0" encoding="utf-8"?>
+<p:notes xmlns:a="http://schemas.openxmlformats.org/drawingml/2006/main" xmlns:p="http://schemas.openxmlformats.org/presentationml/2006/main" xmlns:r="http://schemas.openxmlformats.org/officeDocument/2006/relationships">
+  <p:cSld>
+    <p:spTree>
+      <p:nvGrpSpPr>
+        <p:cNvPr id="1" name=""/>
+        <p:cNvGrpSpPr/>
+        <p:nvPr/>
+      </p:nvGrpSpPr>
+      <p:grpSpPr>
+        <a:xfrm>
+          <a:off x="0" y="0"/>
+          <a:ext cx="0" cy="0"/>
+          <a:chOff x="0" y="0"/>
+          <a:chExt cx="0" cy="0"/>
+        </a:xfrm>
+      </p:grpSpPr>
+      <p:sp>
+        <p:nvSpPr>
+          <p:cNvPr id="2" name="Slide Image Placeholder 1"/>
+          <p:cNvSpPr>
+            <a:spLocks noGrp="1"/>
+          </p:cNvSpPr>
+          <p:nvPr>
+            <p:ph type="sldImg" idx="2"/>
+          </p:nvPr>
+        </p:nvSpPr>
+        <p:spPr/>
+      </p:sp>
+      <p:sp>
+        <p:nvSpPr>
+          <p:cNvPr id="3" name="Notes Placeholder 2"/>
+          <p:cNvSpPr>
+            <a:spLocks noGrp="1"/>
+          </p:cNvSpPr>
+          <p:nvPr>
+            <p:ph type="body" idx="3" sz="quarter"/>
+          </p:nvPr>
+        </p:nvSpPr>
+        <p:spPr/>
+        <p:txBody>
+          <a:bodyPr/>
+          <a:lstStyle/>
+          <a:p>
+            <a:r>
+              <a:t>Готовые ответы: почему TaskBackend, почему acks_late, почему две очереди, почему результат в файлах, почему Redis для демо и RabbitMQ для продакшена.</a:t>
             </a:r>
           </a:p>
         </p:txBody>
@@ -10778,7 +10859,7 @@
                 </a:solidFill>
                 <a:latin typeface="Segoe UI"/>
               </a:rPr>
-              <a:t> на коротких задачах и на постановке — распространённое «RabbitMQ тяжёлый и медленный» не подтвердилось.</a:t>
+              <a:t> на коротких задачах и на постановке. Результат контринтуитивный — на следующем слайде разбор, почему так вышло.</a:t>
             </a:r>
           </a:p>
           <a:p>
@@ -11034,7 +11115,7 @@
                 </a:solidFill>
                 <a:latin typeface="Segoe UI"/>
               </a:rPr>
-              <a:t>Выводы: чеклист выбора</a:t>
+              <a:t>Проверка результата: почему Redis «проиграл»</a:t>
             </a:r>
           </a:p>
         </p:txBody>
@@ -11112,7 +11193,7 @@
                 </a:solidFill>
                 <a:latin typeface="Segoe UI"/>
               </a:rPr>
-              <a:t>Что брать под конкретную задачу</a:t>
+              <a:t>Интуиция говорила обратное — разобрал замер по частям</a:t>
             </a:r>
           </a:p>
         </p:txBody>
@@ -11126,8 +11207,8 @@
           <p:nvPr/>
         </p:nvGraphicFramePr>
         <p:xfrm>
-          <a:off x="566928" y="1868348"/>
-          <a:ext cx="11057838" cy="2996946"/>
+          <a:off x="566928" y="1893907"/>
+          <a:ext cx="11057838" cy="1943646"/>
         </p:xfrm>
         <a:graphic>
           <a:graphicData uri="http://schemas.openxmlformats.org/drawingml/2006/table">
@@ -11136,23 +11217,23 @@
                 <a:tableStyleId>{5C22544A-7EE6-4342-B048-85BDC9FD1C3A}</a:tableStyleId>
               </a:tblPr>
               <a:tblGrid>
-                <a:gridCol w="4903911"/>
-                <a:gridCol w="6153927"/>
+                <a:gridCol w="5528919"/>
+                <a:gridCol w="5528919"/>
               </a:tblGrid>
-              <a:tr h="332994">
+              <a:tr h="323941">
                 <a:tc>
                   <a:txBody>
                     <a:bodyPr wrap="square"/>
                     <a:lstStyle/>
                     <a:p>
                       <a:r>
-                        <a:rPr sz="950" b="1">
+                        <a:rPr sz="896" b="1">
                           <a:solidFill>
                             <a:srgbClr val="FFFFFF"/>
                           </a:solidFill>
                           <a:latin typeface="Segoe UI"/>
                         </a:rPr>
-                        <a:t>Ситуация</a:t>
+                        <a:t>Замер из контейнера воркера</a:t>
                       </a:r>
                     </a:p>
                   </a:txBody>
@@ -11168,13 +11249,13 @@
                     <a:lstStyle/>
                     <a:p>
                       <a:r>
-                        <a:rPr sz="950" b="1">
+                        <a:rPr sz="896" b="1">
                           <a:solidFill>
                             <a:srgbClr val="FFFFFF"/>
                           </a:solidFill>
                           <a:latin typeface="Segoe UI"/>
                         </a:rPr>
-                        <a:t>Решение</a:t>
+                        <a:t>Результат</a:t>
                       </a:r>
                     </a:p>
                   </a:txBody>
@@ -11185,20 +11266,56 @@
                   </a:tcPr>
                 </a:tc>
               </a:tr>
-              <a:tr h="332994">
+              <a:tr h="323941">
                 <a:tc>
                   <a:txBody>
                     <a:bodyPr wrap="square"/>
                     <a:lstStyle/>
                     <a:p>
                       <a:r>
-                        <a:rPr sz="950" b="0">
+                        <a:rPr sz="896" b="0">
                           <a:solidFill>
                             <a:srgbClr val="1B2738"/>
                           </a:solidFill>
                           <a:latin typeface="Segoe UI"/>
                         </a:rPr>
-                        <a:t>Задача &lt; 10 мс, потеря допустима</a:t>
+                        <a:t>Redis: </a:t>
+                      </a:r>
+                      <a:r>
+                        <a:rPr sz="796" b="0">
+                          <a:solidFill>
+                            <a:srgbClr val="E8590C"/>
+                          </a:solidFill>
+                          <a:latin typeface="Consolas"/>
+                        </a:rPr>
+                        <a:t>PING</a:t>
+                      </a:r>
+                      <a:r>
+                        <a:rPr sz="896" b="0">
+                          <a:solidFill>
+                            <a:srgbClr val="1B2738"/>
+                          </a:solidFill>
+                          <a:latin typeface="Segoe UI"/>
+                        </a:rPr>
+                        <a:t> / </a:t>
+                      </a:r>
+                      <a:r>
+                        <a:rPr sz="796" b="0">
+                          <a:solidFill>
+                            <a:srgbClr val="E8590C"/>
+                          </a:solidFill>
+                          <a:latin typeface="Consolas"/>
+                        </a:rPr>
+                        <a:t>LPUSH</a:t>
+                      </a:r>
+                      <a:r>
+                        <a:rPr sz="896" b="0">
+                          <a:solidFill>
+                            <a:srgbClr val="1B2738"/>
+                          </a:solidFill>
+                          <a:latin typeface="Segoe UI"/>
+                        </a:rPr>
+                        <a:t> по одной</a:t>
                       </a:r>
                     </a:p>
                   </a:txBody>
@@ -11214,40 +11331,13 @@
                     <a:lstStyle/>
                     <a:p>
                       <a:r>
-                        <a:rPr sz="850" b="0">
-                          <a:solidFill>
-                            <a:srgbClr val="E8590C"/>
-                          </a:solidFill>
-                          <a:latin typeface="Consolas"/>
-                        </a:rPr>
-                        <a:t>BackgroundTasks</a:t>
-                      </a:r>
-                      <a:r>
-                        <a:rPr sz="950" b="0">
+                        <a:rPr sz="896" b="0">
                           <a:solidFill>
                             <a:srgbClr val="1B2738"/>
                           </a:solidFill>
                           <a:latin typeface="Segoe UI"/>
                         </a:rPr>
-                        <a:t> / </a:t>
-                      </a:r>
-                      <a:r>
-                        <a:rPr sz="850" b="0">
-                          <a:solidFill>
-                            <a:srgbClr val="E8590C"/>
-                          </a:solidFill>
-                          <a:latin typeface="Consolas"/>
-                        </a:rPr>
-                        <a:t>asyncio.create_task</a:t>
-                      </a:r>
-                      <a:r>
-                        <a:rPr sz="950" b="0">
-                          <a:solidFill>
-                            <a:srgbClr val="1B2738"/>
-                          </a:solidFill>
-                          <a:latin typeface="Segoe UI"/>
-                        </a:rPr>
-                        <a:t> — без брокера</a:t>
+                        <a:t>10 300 / 9 100 оп/с (≈110 мкс round-trip)</a:t>
                       </a:r>
                     </a:p>
                   </a:txBody>
@@ -11258,20 +11348,38 @@
                   </a:tcPr>
                 </a:tc>
               </a:tr>
-              <a:tr h="332994">
+              <a:tr h="323941">
                 <a:tc>
                   <a:txBody>
                     <a:bodyPr wrap="square"/>
                     <a:lstStyle/>
                     <a:p>
                       <a:r>
-                        <a:rPr sz="950" b="0">
+                        <a:rPr sz="896" b="0">
                           <a:solidFill>
                             <a:srgbClr val="1B2738"/>
                           </a:solidFill>
                           <a:latin typeface="Segoe UI"/>
                         </a:rPr>
-                        <a:t>Тысячи коротких задач в секунду</a:t>
+                        <a:t>Redis: </a:t>
+                      </a:r>
+                      <a:r>
+                        <a:rPr sz="796" b="0">
+                          <a:solidFill>
+                            <a:srgbClr val="E8590C"/>
+                          </a:solidFill>
+                          <a:latin typeface="Consolas"/>
+                        </a:rPr>
+                        <a:t>LPUSH</a:t>
+                      </a:r>
+                      <a:r>
+                        <a:rPr sz="896" b="0">
+                          <a:solidFill>
+                            <a:srgbClr val="1B2738"/>
+                          </a:solidFill>
+                          <a:latin typeface="Segoe UI"/>
+                        </a:rPr>
+                        <a:t> пачками по 100 (pipeline)</a:t>
                       </a:r>
                     </a:p>
                   </a:txBody>
@@ -11287,58 +11395,13 @@
                     <a:lstStyle/>
                     <a:p>
                       <a:r>
-                        <a:rPr sz="950" b="0">
+                        <a:rPr sz="896" b="0">
                           <a:solidFill>
                             <a:srgbClr val="1B2738"/>
                           </a:solidFill>
                           <a:latin typeface="Segoe UI"/>
                         </a:rPr>
-                        <a:t>Celery (prefork/threads) или RQ </a:t>
-                      </a:r>
-                      <a:r>
-                        <a:rPr sz="850" b="0">
-                          <a:solidFill>
-                            <a:srgbClr val="E8590C"/>
-                          </a:solidFill>
-                          <a:latin typeface="Consolas"/>
-                        </a:rPr>
-                        <a:t>SimpleWorker</a:t>
-                      </a:r>
-                      <a:r>
-                        <a:rPr sz="950" b="0">
-                          <a:solidFill>
-                            <a:srgbClr val="1B2738"/>
-                          </a:solidFill>
-                          <a:latin typeface="Segoe UI"/>
-                        </a:rPr>
-                        <a:t>; </a:t>
-                      </a:r>
-                      <a:r>
-                        <a:rPr sz="950" b="1">
-                          <a:solidFill>
-                            <a:srgbClr val="1B2738"/>
-                          </a:solidFill>
-                          <a:latin typeface="Segoe UI"/>
-                        </a:rPr>
-                        <a:t>не</a:t>
-                      </a:r>
-                      <a:r>
-                        <a:rPr sz="950" b="0">
-                          <a:solidFill>
-                            <a:srgbClr val="1B2738"/>
-                          </a:solidFill>
-                          <a:latin typeface="Segoe UI"/>
-                        </a:rPr>
-                        <a:t> RQ </a:t>
-                      </a:r>
-                      <a:r>
-                        <a:rPr sz="850" b="0">
-                          <a:solidFill>
-                            <a:srgbClr val="E8590C"/>
-                          </a:solidFill>
-                          <a:latin typeface="Consolas"/>
-                        </a:rPr>
-                        <a:t>Worker</a:t>
+                        <a:t>106 700 оп/с</a:t>
                       </a:r>
                     </a:p>
                   </a:txBody>
@@ -11349,20 +11412,20 @@
                   </a:tcPr>
                 </a:tc>
               </a:tr>
-              <a:tr h="332994">
+              <a:tr h="323941">
                 <a:tc>
                   <a:txBody>
                     <a:bodyPr wrap="square"/>
                     <a:lstStyle/>
                     <a:p>
                       <a:r>
-                        <a:rPr sz="950" b="0">
+                        <a:rPr sz="896" b="0">
                           <a:solidFill>
                             <a:srgbClr val="1B2738"/>
                           </a:solidFill>
                           <a:latin typeface="Segoe UI"/>
                         </a:rPr>
-                        <a:t>Пайплайны, периодика, приоритеты, разные пулы</a:t>
+                        <a:t>Celery: публикация задачи → Redis</a:t>
                       </a:r>
                     </a:p>
                   </a:txBody>
@@ -11378,13 +11441,13 @@
                     <a:lstStyle/>
                     <a:p>
                       <a:r>
-                        <a:rPr sz="950" b="0">
+                        <a:rPr sz="896" b="0">
                           <a:solidFill>
                             <a:srgbClr val="1B2738"/>
                           </a:solidFill>
                           <a:latin typeface="Segoe UI"/>
                         </a:rPr>
-                        <a:t>Celery</a:t>
+                        <a:t>1 169 оп/с (855 мкс)</a:t>
                       </a:r>
                     </a:p>
                   </a:txBody>
@@ -11395,20 +11458,20 @@
                   </a:tcPr>
                 </a:tc>
               </a:tr>
-              <a:tr h="332994">
+              <a:tr h="323941">
                 <a:tc>
                   <a:txBody>
                     <a:bodyPr wrap="square"/>
                     <a:lstStyle/>
                     <a:p>
                       <a:r>
-                        <a:rPr sz="950" b="0">
+                        <a:rPr sz="896" b="0">
                           <a:solidFill>
                             <a:srgbClr val="1B2738"/>
                           </a:solidFill>
                           <a:latin typeface="Segoe UI"/>
                         </a:rPr>
-                        <a:t>Уже есть Redis, задач немного, важна простота</a:t>
+                        <a:t>Celery: публикация задачи → RabbitMQ</a:t>
                       </a:r>
                     </a:p>
                   </a:txBody>
@@ -11424,13 +11487,13 @@
                     <a:lstStyle/>
                     <a:p>
                       <a:r>
-                        <a:rPr sz="950" b="0">
+                        <a:rPr sz="896" b="0">
                           <a:solidFill>
                             <a:srgbClr val="1B2738"/>
                           </a:solidFill>
                           <a:latin typeface="Segoe UI"/>
                         </a:rPr>
-                        <a:t>RQ</a:t>
+                        <a:t>1 901 оп/с (526 мкс)</a:t>
                       </a:r>
                     </a:p>
                   </a:txBody>
@@ -11441,20 +11504,29 @@
                   </a:tcPr>
                 </a:tc>
               </a:tr>
-              <a:tr h="332994">
+              <a:tr h="323941">
                 <a:tc>
                   <a:txBody>
                     <a:bodyPr wrap="square"/>
                     <a:lstStyle/>
                     <a:p>
                       <a:r>
-                        <a:rPr sz="950" b="0">
+                        <a:rPr sz="896" b="0">
                           <a:solidFill>
                             <a:srgbClr val="1B2738"/>
                           </a:solidFill>
                           <a:latin typeface="Segoe UI"/>
                         </a:rPr>
-                        <a:t>Потеря задачи недопустима</a:t>
+                        <a:t>Celery: → RabbitMQ + </a:t>
+                      </a:r>
+                      <a:r>
+                        <a:rPr sz="796" b="0">
+                          <a:solidFill>
+                            <a:srgbClr val="E8590C"/>
+                          </a:solidFill>
+                          <a:latin typeface="Consolas"/>
+                        </a:rPr>
+                        <a:t>confirm_publish=True</a:t>
                       </a:r>
                     </a:p>
                   </a:txBody>
@@ -11470,31 +11542,22 @@
                     <a:lstStyle/>
                     <a:p>
                       <a:r>
-                        <a:rPr sz="950" b="0">
+                        <a:rPr sz="896" b="1">
                           <a:solidFill>
                             <a:srgbClr val="1B2738"/>
                           </a:solidFill>
                           <a:latin typeface="Segoe UI"/>
                         </a:rPr>
-                        <a:t>RabbitMQ + </a:t>
-                      </a:r>
-                      <a:r>
-                        <a:rPr sz="850" b="0">
-                          <a:solidFill>
-                            <a:srgbClr val="E8590C"/>
-                          </a:solidFill>
-                          <a:latin typeface="Consolas"/>
-                        </a:rPr>
-                        <a:t>acks_late</a:t>
-                      </a:r>
-                      <a:r>
-                        <a:rPr sz="950" b="0">
+                        <a:t>218 оп/с</a:t>
+                      </a:r>
+                      <a:r>
+                        <a:rPr sz="896" b="0">
                           <a:solidFill>
                             <a:srgbClr val="1B2738"/>
                           </a:solidFill>
                           <a:latin typeface="Segoe UI"/>
                         </a:rPr>
-                        <a:t> + идемпотентность + DLX</a:t>
+                        <a:t> (4 584 мкс)</a:t>
                       </a:r>
                     </a:p>
                   </a:txBody>
@@ -11505,144 +11568,6 @@
                   </a:tcPr>
                 </a:tc>
               </a:tr>
-              <a:tr h="332994">
-                <a:tc>
-                  <a:txBody>
-                    <a:bodyPr wrap="square"/>
-                    <a:lstStyle/>
-                    <a:p>
-                      <a:r>
-                        <a:rPr sz="950" b="0">
-                          <a:solidFill>
-                            <a:srgbClr val="1B2738"/>
-                          </a:solidFill>
-                          <a:latin typeface="Segoe UI"/>
-                        </a:rPr>
-                        <a:t>Приложение на asyncio</a:t>
-                      </a:r>
-                    </a:p>
-                  </a:txBody>
-                  <a:tcPr marL="82296" marR="82296" marT="27432" marB="27432" anchor="ctr">
-                    <a:solidFill>
-                      <a:srgbClr val="F2F5FA"/>
-                    </a:solidFill>
-                  </a:tcPr>
-                </a:tc>
-                <a:tc>
-                  <a:txBody>
-                    <a:bodyPr wrap="square"/>
-                    <a:lstStyle/>
-                    <a:p>
-                      <a:r>
-                        <a:rPr sz="950" b="0">
-                          <a:solidFill>
-                            <a:srgbClr val="1B2738"/>
-                          </a:solidFill>
-                          <a:latin typeface="Segoe UI"/>
-                        </a:rPr>
-                        <a:t>arq / Taskiq / Dramatiq</a:t>
-                      </a:r>
-                    </a:p>
-                  </a:txBody>
-                  <a:tcPr marL="82296" marR="82296" marT="27432" marB="27432" anchor="ctr">
-                    <a:solidFill>
-                      <a:srgbClr val="F2F5FA"/>
-                    </a:solidFill>
-                  </a:tcPr>
-                </a:tc>
-              </a:tr>
-              <a:tr h="332994">
-                <a:tc>
-                  <a:txBody>
-                    <a:bodyPr wrap="square"/>
-                    <a:lstStyle/>
-                    <a:p>
-                      <a:r>
-                        <a:rPr sz="950" b="0">
-                          <a:solidFill>
-                            <a:srgbClr val="1B2738"/>
-                          </a:solidFill>
-                          <a:latin typeface="Segoe UI"/>
-                        </a:rPr>
-                        <a:t>Нужен порядок событий и replay</a:t>
-                      </a:r>
-                    </a:p>
-                  </a:txBody>
-                  <a:tcPr marL="82296" marR="82296" marT="27432" marB="27432" anchor="ctr">
-                    <a:solidFill>
-                      <a:srgbClr val="FFFFFF"/>
-                    </a:solidFill>
-                  </a:tcPr>
-                </a:tc>
-                <a:tc>
-                  <a:txBody>
-                    <a:bodyPr wrap="square"/>
-                    <a:lstStyle/>
-                    <a:p>
-                      <a:r>
-                        <a:rPr sz="950" b="0">
-                          <a:solidFill>
-                            <a:srgbClr val="1B2738"/>
-                          </a:solidFill>
-                          <a:latin typeface="Segoe UI"/>
-                        </a:rPr>
-                        <a:t>Kafka / Redis Streams — это не очередь задач</a:t>
-                      </a:r>
-                    </a:p>
-                  </a:txBody>
-                  <a:tcPr marL="82296" marR="82296" marT="27432" marB="27432" anchor="ctr">
-                    <a:solidFill>
-                      <a:srgbClr val="FFFFFF"/>
-                    </a:solidFill>
-                  </a:tcPr>
-                </a:tc>
-              </a:tr>
-              <a:tr h="332994">
-                <a:tc>
-                  <a:txBody>
-                    <a:bodyPr wrap="square"/>
-                    <a:lstStyle/>
-                    <a:p>
-                      <a:r>
-                        <a:rPr sz="950" b="0">
-                          <a:solidFill>
-                            <a:srgbClr val="1B2738"/>
-                          </a:solidFill>
-                          <a:latin typeface="Segoe UI"/>
-                        </a:rPr>
-                        <a:t>Долгие процессы с компенсациями</a:t>
-                      </a:r>
-                    </a:p>
-                  </a:txBody>
-                  <a:tcPr marL="82296" marR="82296" marT="27432" marB="27432" anchor="ctr">
-                    <a:solidFill>
-                      <a:srgbClr val="F2F5FA"/>
-                    </a:solidFill>
-                  </a:tcPr>
-                </a:tc>
-                <a:tc>
-                  <a:txBody>
-                    <a:bodyPr wrap="square"/>
-                    <a:lstStyle/>
-                    <a:p>
-                      <a:r>
-                        <a:rPr sz="950" b="0">
-                          <a:solidFill>
-                            <a:srgbClr val="1B2738"/>
-                          </a:solidFill>
-                          <a:latin typeface="Segoe UI"/>
-                        </a:rPr>
-                        <a:t>Temporal / Prefect</a:t>
-                      </a:r>
-                    </a:p>
-                  </a:txBody>
-                  <a:tcPr marL="82296" marR="82296" marT="27432" marB="27432" anchor="ctr">
-                    <a:solidFill>
-                      <a:srgbClr val="F2F5FA"/>
-                    </a:solidFill>
-                  </a:tcPr>
-                </a:tc>
-              </a:tr>
             </a:tbl>
           </a:graphicData>
         </a:graphic>
@@ -11655,8 +11580,8 @@
         </p:nvSpPr>
         <p:spPr>
           <a:xfrm>
-            <a:off x="566928" y="5139614"/>
-            <a:ext cx="11057839" cy="1038758"/>
+            <a:off x="566928" y="4111873"/>
+            <a:ext cx="11057839" cy="1250899"/>
           </a:xfrm>
           <a:prstGeom prst="rect">
             <a:avLst/>
@@ -11671,7 +11596,7 @@
           <a:p>
             <a:pPr marL="237744" indent="-219456">
               <a:spcAft>
-                <a:spcPts val="532"/>
+                <a:spcPts val="448"/>
               </a:spcAft>
               <a:buClr>
                 <a:srgbClr val="2F6FED"/>
@@ -11680,28 +11605,28 @@
               <a:buChar char="■"/>
             </a:pPr>
             <a:r>
-              <a:rPr sz="1520" b="1">
-                <a:solidFill>
-                  <a:srgbClr val="1B2738"/>
-                </a:solidFill>
-                <a:latin typeface="Segoe UI"/>
-              </a:rPr>
-              <a:t>Идемпотентность — не опция</a:t>
-            </a:r>
-            <a:r>
-              <a:rPr sz="1520" b="0">
-                <a:solidFill>
-                  <a:srgbClr val="1B2738"/>
-                </a:solidFill>
-                <a:latin typeface="Segoe UI"/>
-              </a:rPr>
-              <a:t>, а условие корректности при at-least-once.</a:t>
+              <a:rPr sz="1056" b="1">
+                <a:solidFill>
+                  <a:srgbClr val="1B2738"/>
+                </a:solidFill>
+                <a:latin typeface="Segoe UI"/>
+              </a:rPr>
+              <a:t>Redis работал на ~10 % своего потолка</a:t>
+            </a:r>
+            <a:r>
+              <a:rPr sz="1056" b="0">
+                <a:solidFill>
+                  <a:srgbClr val="1B2738"/>
+                </a:solidFill>
+                <a:latin typeface="Segoe UI"/>
+              </a:rPr>
+              <a:t>: упирались не в него, а в число синхронных round-trip'ов — транспорт kombu эмулирует ack четырьмя командами на задачу.</a:t>
             </a:r>
           </a:p>
           <a:p>
             <a:pPr marL="237744" indent="-219456">
               <a:spcAft>
-                <a:spcPts val="532"/>
+                <a:spcPts val="448"/>
               </a:spcAft>
               <a:buClr>
                 <a:srgbClr val="2F6FED"/>
@@ -11710,28 +11635,28 @@
               <a:buChar char="■"/>
             </a:pPr>
             <a:r>
-              <a:rPr sz="1520" b="1">
-                <a:solidFill>
-                  <a:srgbClr val="1B2738"/>
-                </a:solidFill>
-                <a:latin typeface="Segoe UI"/>
-              </a:rPr>
-              <a:t>Умолчания фреймворков меняют гарантии и скорость в разы</a:t>
-            </a:r>
-            <a:r>
-              <a:rPr sz="1520" b="0">
-                <a:solidFill>
-                  <a:srgbClr val="1B2738"/>
-                </a:solidFill>
-                <a:latin typeface="Segoe UI"/>
-              </a:rPr>
-              <a:t> — их нужно выбирать осознанно.</a:t>
+              <a:rPr sz="1056" b="1">
+                <a:solidFill>
+                  <a:srgbClr val="1B2738"/>
+                </a:solidFill>
+                <a:latin typeface="Segoe UI"/>
+              </a:rPr>
+              <a:t>Главная цена — сам Celery</a:t>
+            </a:r>
+            <a:r>
+              <a:rPr sz="1056" b="0">
+                <a:solidFill>
+                  <a:srgbClr val="1B2738"/>
+                </a:solidFill>
+                <a:latin typeface="Segoe UI"/>
+              </a:rPr>
+              <a:t> (380–570 мкс на сборку сообщения), а не брокер: RQ на том же Redis ставит 2 300 задач/с.</a:t>
             </a:r>
           </a:p>
           <a:p>
             <a:pPr marL="237744" indent="-219456">
               <a:spcAft>
-                <a:spcPts val="532"/>
+                <a:spcPts val="448"/>
               </a:spcAft>
               <a:buClr>
                 <a:srgbClr val="2F6FED"/>
@@ -11740,65 +11665,219 @@
               <a:buChar char="■"/>
             </a:pPr>
             <a:r>
-              <a:rPr sz="1520" b="1">
-                <a:solidFill>
-                  <a:srgbClr val="1B2738"/>
-                </a:solidFill>
-                <a:latin typeface="Segoe UI"/>
-              </a:rPr>
-              <a:t>Измерять, а не верить</a:t>
-            </a:r>
-            <a:r>
-              <a:rPr sz="1520" b="0">
-                <a:solidFill>
-                  <a:srgbClr val="1B2738"/>
-                </a:solidFill>
-                <a:latin typeface="Segoe UI"/>
-              </a:rPr>
-              <a:t>: разница RQ </a:t>
-            </a:r>
-            <a:r>
-              <a:rPr sz="1420" b="0">
+              <a:rPr sz="1056" b="1">
+                <a:solidFill>
+                  <a:srgbClr val="1B2738"/>
+                </a:solidFill>
+                <a:latin typeface="Segoe UI"/>
+              </a:rPr>
+              <a:t>Асимметрия замера</a:t>
+            </a:r>
+            <a:r>
+              <a:rPr sz="1056" b="0">
+                <a:solidFill>
+                  <a:srgbClr val="1B2738"/>
+                </a:solidFill>
+                <a:latin typeface="Segoe UI"/>
+              </a:rPr>
+              <a:t>: в </a:t>
+            </a:r>
+            <a:r>
+              <a:rPr sz="956" b="0">
                 <a:solidFill>
                   <a:srgbClr val="E8590C"/>
                 </a:solidFill>
                 <a:latin typeface="Consolas"/>
               </a:rPr>
-              <a:t>Worker</a:t>
-            </a:r>
-            <a:r>
-              <a:rPr sz="1520" b="0">
-                <a:solidFill>
-                  <a:srgbClr val="1B2738"/>
-                </a:solidFill>
-                <a:latin typeface="Segoe UI"/>
-              </a:rPr>
-              <a:t> и </a:t>
-            </a:r>
-            <a:r>
-              <a:rPr sz="1420" b="0">
-                <a:solidFill>
-                  <a:srgbClr val="E8590C"/>
-                </a:solidFill>
-                <a:latin typeface="Consolas"/>
-              </a:rPr>
-              <a:t>SimpleWorker</a:t>
-            </a:r>
-            <a:r>
-              <a:rPr sz="1520" b="0">
-                <a:solidFill>
-                  <a:srgbClr val="1B2738"/>
-                </a:solidFill>
-                <a:latin typeface="Segoe UI"/>
-              </a:rPr>
-              <a:t> — 20×, разница Redis и RabbitMQ на реальных задачах — 0 %.</a:t>
-            </a:r>
-          </a:p>
-        </p:txBody>
-      </p:sp>
-      <p:sp>
-        <p:nvSpPr>
-          <p:cNvPr id="7" name="TextBox 6"/>
+              <a:t>celery-redis</a:t>
+            </a:r>
+            <a:r>
+              <a:rPr sz="1056" b="0">
+                <a:solidFill>
+                  <a:srgbClr val="1B2738"/>
+                </a:solidFill>
+                <a:latin typeface="Segoe UI"/>
+              </a:rPr>
+              <a:t> один однопоточный Redis обслуживал брокер + события Flower + result backend — 26 команд на задачу против 13 у конфигурации с RabbitMQ.</a:t>
+            </a:r>
+          </a:p>
+          <a:p>
+            <a:pPr marL="237744" indent="-219456">
+              <a:spcAft>
+                <a:spcPts val="448"/>
+              </a:spcAft>
+              <a:buClr>
+                <a:srgbClr val="2F6FED"/>
+              </a:buClr>
+              <a:buFont typeface="Arial"/>
+              <a:buChar char="■"/>
+            </a:pPr>
+            <a:r>
+              <a:rPr sz="1056" b="1">
+                <a:solidFill>
+                  <a:srgbClr val="1B2738"/>
+                </a:solidFill>
+                <a:latin typeface="Segoe UI"/>
+              </a:rPr>
+              <a:t>Преимущество AMQP куплено гарантией</a:t>
+            </a:r>
+            <a:r>
+              <a:rPr sz="1056" b="0">
+                <a:solidFill>
+                  <a:srgbClr val="1B2738"/>
+                </a:solidFill>
+                <a:latin typeface="Segoe UI"/>
+              </a:rPr>
+              <a:t>: publish по умолчанию не подтверждается; включаем confirms — RabbitMQ в 8 раз медленнее Redis.</a:t>
+            </a:r>
+          </a:p>
+        </p:txBody>
+      </p:sp>
+      <p:sp>
+        <p:nvSpPr>
+          <p:cNvPr id="7" name="Rectangle 6"/>
+          <p:cNvSpPr/>
+          <p:nvPr/>
+        </p:nvSpPr>
+        <p:spPr>
+          <a:xfrm>
+            <a:off x="566928" y="5472500"/>
+            <a:ext cx="11057839" cy="625449"/>
+          </a:xfrm>
+          <a:prstGeom prst="rect">
+            <a:avLst/>
+          </a:prstGeom>
+          <a:solidFill>
+            <a:srgbClr val="F2F5FA"/>
+          </a:solidFill>
+          <a:ln w="9525">
+            <a:solidFill>
+              <a:srgbClr val="D5DDE7"/>
+            </a:solidFill>
+          </a:ln>
+          <a:effectLst/>
+        </p:spPr>
+        <p:style>
+          <a:lnRef idx="1">
+            <a:schemeClr val="accent1"/>
+          </a:lnRef>
+          <a:fillRef idx="3">
+            <a:schemeClr val="accent1"/>
+          </a:fillRef>
+          <a:effectRef idx="2">
+            <a:schemeClr val="accent1"/>
+          </a:effectRef>
+          <a:fontRef idx="minor">
+            <a:schemeClr val="lt1"/>
+          </a:fontRef>
+        </p:style>
+        <p:txBody>
+          <a:bodyPr rtlCol="0" anchor="ctr"/>
+          <a:lstStyle/>
+          <a:p>
+            <a:pPr algn="ctr"/>
+          </a:p>
+        </p:txBody>
+      </p:sp>
+      <p:sp>
+        <p:nvSpPr>
+          <p:cNvPr id="8" name="Rectangle 7"/>
+          <p:cNvSpPr/>
+          <p:nvPr/>
+        </p:nvSpPr>
+        <p:spPr>
+          <a:xfrm>
+            <a:off x="566928" y="5472500"/>
+            <a:ext cx="63500" cy="625449"/>
+          </a:xfrm>
+          <a:prstGeom prst="rect">
+            <a:avLst/>
+          </a:prstGeom>
+          <a:solidFill>
+            <a:srgbClr val="E8590C"/>
+          </a:solidFill>
+          <a:ln>
+            <a:noFill/>
+          </a:ln>
+          <a:effectLst/>
+        </p:spPr>
+        <p:style>
+          <a:lnRef idx="1">
+            <a:schemeClr val="accent1"/>
+          </a:lnRef>
+          <a:fillRef idx="3">
+            <a:schemeClr val="accent1"/>
+          </a:fillRef>
+          <a:effectRef idx="2">
+            <a:schemeClr val="accent1"/>
+          </a:effectRef>
+          <a:fontRef idx="minor">
+            <a:schemeClr val="lt1"/>
+          </a:fontRef>
+        </p:style>
+        <p:txBody>
+          <a:bodyPr rtlCol="0" anchor="ctr"/>
+          <a:lstStyle/>
+          <a:p>
+            <a:pPr algn="ctr"/>
+          </a:p>
+        </p:txBody>
+      </p:sp>
+      <p:sp>
+        <p:nvSpPr>
+          <p:cNvPr id="9" name="TextBox 8"/>
+          <p:cNvSpPr txBox="1"/>
+          <p:nvPr/>
+        </p:nvSpPr>
+        <p:spPr>
+          <a:xfrm>
+            <a:off x="804672" y="5600516"/>
+            <a:ext cx="10600639" cy="625449"/>
+          </a:xfrm>
+          <a:prstGeom prst="rect">
+            <a:avLst/>
+          </a:prstGeom>
+          <a:noFill/>
+        </p:spPr>
+        <p:txBody>
+          <a:bodyPr wrap="square" lIns="0" rIns="0" tIns="0" bIns="0">
+            <a:spAutoFit/>
+          </a:bodyPr>
+          <a:lstStyle/>
+          <a:p>
+            <a:r>
+              <a:rPr sz="1024" b="0">
+                <a:solidFill>
+                  <a:srgbClr val="1B2738"/>
+                </a:solidFill>
+                <a:latin typeface="Segoe UI"/>
+              </a:rPr>
+              <a:t>Правильная формулировка: медленнее не Redis, а Redis-</a:t>
+            </a:r>
+            <a:r>
+              <a:rPr sz="1024" b="1">
+                <a:solidFill>
+                  <a:srgbClr val="1B2738"/>
+                </a:solidFill>
+                <a:latin typeface="Segoe UI"/>
+              </a:rPr>
+              <a:t>транспорт</a:t>
+            </a:r>
+            <a:r>
+              <a:rPr sz="1024" b="0">
+                <a:solidFill>
+                  <a:srgbClr val="1B2738"/>
+                </a:solidFill>
+                <a:latin typeface="Segoe UI"/>
+              </a:rPr>
+              <a:t> kombu в этой конфигурации. Вывод для выбора не меняется — RabbitMQ берут за гарантии, а не за скорость.</a:t>
+            </a:r>
+          </a:p>
+        </p:txBody>
+      </p:sp>
+      <p:sp>
+        <p:nvSpPr>
+          <p:cNvPr id="10" name="TextBox 9"/>
           <p:cNvSpPr txBox="1"/>
           <p:nvPr/>
         </p:nvSpPr>
@@ -11832,7 +11911,7 @@
       </p:sp>
       <p:sp>
         <p:nvSpPr>
-          <p:cNvPr id="8" name="TextBox 7"/>
+          <p:cNvPr id="11" name="TextBox 10"/>
           <p:cNvSpPr txBox="1"/>
           <p:nvPr/>
         </p:nvSpPr>
@@ -12489,7 +12568,7 @@
                 </a:solidFill>
                 <a:latin typeface="Segoe UI"/>
               </a:rPr>
-              <a:t>Спасибо за внимание</a:t>
+              <a:t>Выводы: чеклист выбора</a:t>
             </a:r>
           </a:p>
         </p:txBody>
@@ -12567,6 +12646,893 @@
                 </a:solidFill>
                 <a:latin typeface="Segoe UI"/>
               </a:rPr>
+              <a:t>Что брать под конкретную задачу</a:t>
+            </a:r>
+          </a:p>
+        </p:txBody>
+      </p:sp>
+      <p:graphicFrame>
+        <p:nvGraphicFramePr>
+          <p:cNvPr id="5" name="Table 4"/>
+          <p:cNvGraphicFramePr>
+            <a:graphicFrameLocks noGrp="1"/>
+          </p:cNvGraphicFramePr>
+          <p:nvPr/>
+        </p:nvGraphicFramePr>
+        <p:xfrm>
+          <a:off x="566928" y="1868348"/>
+          <a:ext cx="11057838" cy="2996946"/>
+        </p:xfrm>
+        <a:graphic>
+          <a:graphicData uri="http://schemas.openxmlformats.org/drawingml/2006/table">
+            <a:tbl>
+              <a:tblPr firstRow="1" bandRow="1">
+                <a:tableStyleId>{5C22544A-7EE6-4342-B048-85BDC9FD1C3A}</a:tableStyleId>
+              </a:tblPr>
+              <a:tblGrid>
+                <a:gridCol w="4903911"/>
+                <a:gridCol w="6153927"/>
+              </a:tblGrid>
+              <a:tr h="332994">
+                <a:tc>
+                  <a:txBody>
+                    <a:bodyPr wrap="square"/>
+                    <a:lstStyle/>
+                    <a:p>
+                      <a:r>
+                        <a:rPr sz="950" b="1">
+                          <a:solidFill>
+                            <a:srgbClr val="FFFFFF"/>
+                          </a:solidFill>
+                          <a:latin typeface="Segoe UI"/>
+                        </a:rPr>
+                        <a:t>Ситуация</a:t>
+                      </a:r>
+                    </a:p>
+                  </a:txBody>
+                  <a:tcPr marL="82296" marR="82296" marT="27432" marB="27432" anchor="ctr">
+                    <a:solidFill>
+                      <a:srgbClr val="2F6FED"/>
+                    </a:solidFill>
+                  </a:tcPr>
+                </a:tc>
+                <a:tc>
+                  <a:txBody>
+                    <a:bodyPr wrap="square"/>
+                    <a:lstStyle/>
+                    <a:p>
+                      <a:r>
+                        <a:rPr sz="950" b="1">
+                          <a:solidFill>
+                            <a:srgbClr val="FFFFFF"/>
+                          </a:solidFill>
+                          <a:latin typeface="Segoe UI"/>
+                        </a:rPr>
+                        <a:t>Решение</a:t>
+                      </a:r>
+                    </a:p>
+                  </a:txBody>
+                  <a:tcPr marL="82296" marR="82296" marT="27432" marB="27432" anchor="ctr">
+                    <a:solidFill>
+                      <a:srgbClr val="2F6FED"/>
+                    </a:solidFill>
+                  </a:tcPr>
+                </a:tc>
+              </a:tr>
+              <a:tr h="332994">
+                <a:tc>
+                  <a:txBody>
+                    <a:bodyPr wrap="square"/>
+                    <a:lstStyle/>
+                    <a:p>
+                      <a:r>
+                        <a:rPr sz="950" b="0">
+                          <a:solidFill>
+                            <a:srgbClr val="1B2738"/>
+                          </a:solidFill>
+                          <a:latin typeface="Segoe UI"/>
+                        </a:rPr>
+                        <a:t>Задача &lt; 10 мс, потеря допустима</a:t>
+                      </a:r>
+                    </a:p>
+                  </a:txBody>
+                  <a:tcPr marL="82296" marR="82296" marT="27432" marB="27432" anchor="ctr">
+                    <a:solidFill>
+                      <a:srgbClr val="FFFFFF"/>
+                    </a:solidFill>
+                  </a:tcPr>
+                </a:tc>
+                <a:tc>
+                  <a:txBody>
+                    <a:bodyPr wrap="square"/>
+                    <a:lstStyle/>
+                    <a:p>
+                      <a:r>
+                        <a:rPr sz="850" b="0">
+                          <a:solidFill>
+                            <a:srgbClr val="E8590C"/>
+                          </a:solidFill>
+                          <a:latin typeface="Consolas"/>
+                        </a:rPr>
+                        <a:t>BackgroundTasks</a:t>
+                      </a:r>
+                      <a:r>
+                        <a:rPr sz="950" b="0">
+                          <a:solidFill>
+                            <a:srgbClr val="1B2738"/>
+                          </a:solidFill>
+                          <a:latin typeface="Segoe UI"/>
+                        </a:rPr>
+                        <a:t> / </a:t>
+                      </a:r>
+                      <a:r>
+                        <a:rPr sz="850" b="0">
+                          <a:solidFill>
+                            <a:srgbClr val="E8590C"/>
+                          </a:solidFill>
+                          <a:latin typeface="Consolas"/>
+                        </a:rPr>
+                        <a:t>asyncio.create_task</a:t>
+                      </a:r>
+                      <a:r>
+                        <a:rPr sz="950" b="0">
+                          <a:solidFill>
+                            <a:srgbClr val="1B2738"/>
+                          </a:solidFill>
+                          <a:latin typeface="Segoe UI"/>
+                        </a:rPr>
+                        <a:t> — без брокера</a:t>
+                      </a:r>
+                    </a:p>
+                  </a:txBody>
+                  <a:tcPr marL="82296" marR="82296" marT="27432" marB="27432" anchor="ctr">
+                    <a:solidFill>
+                      <a:srgbClr val="FFFFFF"/>
+                    </a:solidFill>
+                  </a:tcPr>
+                </a:tc>
+              </a:tr>
+              <a:tr h="332994">
+                <a:tc>
+                  <a:txBody>
+                    <a:bodyPr wrap="square"/>
+                    <a:lstStyle/>
+                    <a:p>
+                      <a:r>
+                        <a:rPr sz="950" b="0">
+                          <a:solidFill>
+                            <a:srgbClr val="1B2738"/>
+                          </a:solidFill>
+                          <a:latin typeface="Segoe UI"/>
+                        </a:rPr>
+                        <a:t>Тысячи коротких задач в секунду</a:t>
+                      </a:r>
+                    </a:p>
+                  </a:txBody>
+                  <a:tcPr marL="82296" marR="82296" marT="27432" marB="27432" anchor="ctr">
+                    <a:solidFill>
+                      <a:srgbClr val="F2F5FA"/>
+                    </a:solidFill>
+                  </a:tcPr>
+                </a:tc>
+                <a:tc>
+                  <a:txBody>
+                    <a:bodyPr wrap="square"/>
+                    <a:lstStyle/>
+                    <a:p>
+                      <a:r>
+                        <a:rPr sz="950" b="0">
+                          <a:solidFill>
+                            <a:srgbClr val="1B2738"/>
+                          </a:solidFill>
+                          <a:latin typeface="Segoe UI"/>
+                        </a:rPr>
+                        <a:t>Celery (prefork/threads) или RQ </a:t>
+                      </a:r>
+                      <a:r>
+                        <a:rPr sz="850" b="0">
+                          <a:solidFill>
+                            <a:srgbClr val="E8590C"/>
+                          </a:solidFill>
+                          <a:latin typeface="Consolas"/>
+                        </a:rPr>
+                        <a:t>SimpleWorker</a:t>
+                      </a:r>
+                      <a:r>
+                        <a:rPr sz="950" b="0">
+                          <a:solidFill>
+                            <a:srgbClr val="1B2738"/>
+                          </a:solidFill>
+                          <a:latin typeface="Segoe UI"/>
+                        </a:rPr>
+                        <a:t>; </a:t>
+                      </a:r>
+                      <a:r>
+                        <a:rPr sz="950" b="1">
+                          <a:solidFill>
+                            <a:srgbClr val="1B2738"/>
+                          </a:solidFill>
+                          <a:latin typeface="Segoe UI"/>
+                        </a:rPr>
+                        <a:t>не</a:t>
+                      </a:r>
+                      <a:r>
+                        <a:rPr sz="950" b="0">
+                          <a:solidFill>
+                            <a:srgbClr val="1B2738"/>
+                          </a:solidFill>
+                          <a:latin typeface="Segoe UI"/>
+                        </a:rPr>
+                        <a:t> RQ </a:t>
+                      </a:r>
+                      <a:r>
+                        <a:rPr sz="850" b="0">
+                          <a:solidFill>
+                            <a:srgbClr val="E8590C"/>
+                          </a:solidFill>
+                          <a:latin typeface="Consolas"/>
+                        </a:rPr>
+                        <a:t>Worker</a:t>
+                      </a:r>
+                    </a:p>
+                  </a:txBody>
+                  <a:tcPr marL="82296" marR="82296" marT="27432" marB="27432" anchor="ctr">
+                    <a:solidFill>
+                      <a:srgbClr val="F2F5FA"/>
+                    </a:solidFill>
+                  </a:tcPr>
+                </a:tc>
+              </a:tr>
+              <a:tr h="332994">
+                <a:tc>
+                  <a:txBody>
+                    <a:bodyPr wrap="square"/>
+                    <a:lstStyle/>
+                    <a:p>
+                      <a:r>
+                        <a:rPr sz="950" b="0">
+                          <a:solidFill>
+                            <a:srgbClr val="1B2738"/>
+                          </a:solidFill>
+                          <a:latin typeface="Segoe UI"/>
+                        </a:rPr>
+                        <a:t>Пайплайны, периодика, приоритеты, разные пулы</a:t>
+                      </a:r>
+                    </a:p>
+                  </a:txBody>
+                  <a:tcPr marL="82296" marR="82296" marT="27432" marB="27432" anchor="ctr">
+                    <a:solidFill>
+                      <a:srgbClr val="FFFFFF"/>
+                    </a:solidFill>
+                  </a:tcPr>
+                </a:tc>
+                <a:tc>
+                  <a:txBody>
+                    <a:bodyPr wrap="square"/>
+                    <a:lstStyle/>
+                    <a:p>
+                      <a:r>
+                        <a:rPr sz="950" b="0">
+                          <a:solidFill>
+                            <a:srgbClr val="1B2738"/>
+                          </a:solidFill>
+                          <a:latin typeface="Segoe UI"/>
+                        </a:rPr>
+                        <a:t>Celery</a:t>
+                      </a:r>
+                    </a:p>
+                  </a:txBody>
+                  <a:tcPr marL="82296" marR="82296" marT="27432" marB="27432" anchor="ctr">
+                    <a:solidFill>
+                      <a:srgbClr val="FFFFFF"/>
+                    </a:solidFill>
+                  </a:tcPr>
+                </a:tc>
+              </a:tr>
+              <a:tr h="332994">
+                <a:tc>
+                  <a:txBody>
+                    <a:bodyPr wrap="square"/>
+                    <a:lstStyle/>
+                    <a:p>
+                      <a:r>
+                        <a:rPr sz="950" b="0">
+                          <a:solidFill>
+                            <a:srgbClr val="1B2738"/>
+                          </a:solidFill>
+                          <a:latin typeface="Segoe UI"/>
+                        </a:rPr>
+                        <a:t>Уже есть Redis, задач немного, важна простота</a:t>
+                      </a:r>
+                    </a:p>
+                  </a:txBody>
+                  <a:tcPr marL="82296" marR="82296" marT="27432" marB="27432" anchor="ctr">
+                    <a:solidFill>
+                      <a:srgbClr val="F2F5FA"/>
+                    </a:solidFill>
+                  </a:tcPr>
+                </a:tc>
+                <a:tc>
+                  <a:txBody>
+                    <a:bodyPr wrap="square"/>
+                    <a:lstStyle/>
+                    <a:p>
+                      <a:r>
+                        <a:rPr sz="950" b="0">
+                          <a:solidFill>
+                            <a:srgbClr val="1B2738"/>
+                          </a:solidFill>
+                          <a:latin typeface="Segoe UI"/>
+                        </a:rPr>
+                        <a:t>RQ</a:t>
+                      </a:r>
+                    </a:p>
+                  </a:txBody>
+                  <a:tcPr marL="82296" marR="82296" marT="27432" marB="27432" anchor="ctr">
+                    <a:solidFill>
+                      <a:srgbClr val="F2F5FA"/>
+                    </a:solidFill>
+                  </a:tcPr>
+                </a:tc>
+              </a:tr>
+              <a:tr h="332994">
+                <a:tc>
+                  <a:txBody>
+                    <a:bodyPr wrap="square"/>
+                    <a:lstStyle/>
+                    <a:p>
+                      <a:r>
+                        <a:rPr sz="950" b="0">
+                          <a:solidFill>
+                            <a:srgbClr val="1B2738"/>
+                          </a:solidFill>
+                          <a:latin typeface="Segoe UI"/>
+                        </a:rPr>
+                        <a:t>Потеря задачи недопустима</a:t>
+                      </a:r>
+                    </a:p>
+                  </a:txBody>
+                  <a:tcPr marL="82296" marR="82296" marT="27432" marB="27432" anchor="ctr">
+                    <a:solidFill>
+                      <a:srgbClr val="FFFFFF"/>
+                    </a:solidFill>
+                  </a:tcPr>
+                </a:tc>
+                <a:tc>
+                  <a:txBody>
+                    <a:bodyPr wrap="square"/>
+                    <a:lstStyle/>
+                    <a:p>
+                      <a:r>
+                        <a:rPr sz="950" b="0">
+                          <a:solidFill>
+                            <a:srgbClr val="1B2738"/>
+                          </a:solidFill>
+                          <a:latin typeface="Segoe UI"/>
+                        </a:rPr>
+                        <a:t>RabbitMQ + </a:t>
+                      </a:r>
+                      <a:r>
+                        <a:rPr sz="850" b="0">
+                          <a:solidFill>
+                            <a:srgbClr val="E8590C"/>
+                          </a:solidFill>
+                          <a:latin typeface="Consolas"/>
+                        </a:rPr>
+                        <a:t>acks_late</a:t>
+                      </a:r>
+                      <a:r>
+                        <a:rPr sz="950" b="0">
+                          <a:solidFill>
+                            <a:srgbClr val="1B2738"/>
+                          </a:solidFill>
+                          <a:latin typeface="Segoe UI"/>
+                        </a:rPr>
+                        <a:t> + идемпотентность + DLX</a:t>
+                      </a:r>
+                    </a:p>
+                  </a:txBody>
+                  <a:tcPr marL="82296" marR="82296" marT="27432" marB="27432" anchor="ctr">
+                    <a:solidFill>
+                      <a:srgbClr val="FFFFFF"/>
+                    </a:solidFill>
+                  </a:tcPr>
+                </a:tc>
+              </a:tr>
+              <a:tr h="332994">
+                <a:tc>
+                  <a:txBody>
+                    <a:bodyPr wrap="square"/>
+                    <a:lstStyle/>
+                    <a:p>
+                      <a:r>
+                        <a:rPr sz="950" b="0">
+                          <a:solidFill>
+                            <a:srgbClr val="1B2738"/>
+                          </a:solidFill>
+                          <a:latin typeface="Segoe UI"/>
+                        </a:rPr>
+                        <a:t>Приложение на asyncio</a:t>
+                      </a:r>
+                    </a:p>
+                  </a:txBody>
+                  <a:tcPr marL="82296" marR="82296" marT="27432" marB="27432" anchor="ctr">
+                    <a:solidFill>
+                      <a:srgbClr val="F2F5FA"/>
+                    </a:solidFill>
+                  </a:tcPr>
+                </a:tc>
+                <a:tc>
+                  <a:txBody>
+                    <a:bodyPr wrap="square"/>
+                    <a:lstStyle/>
+                    <a:p>
+                      <a:r>
+                        <a:rPr sz="950" b="0">
+                          <a:solidFill>
+                            <a:srgbClr val="1B2738"/>
+                          </a:solidFill>
+                          <a:latin typeface="Segoe UI"/>
+                        </a:rPr>
+                        <a:t>arq / Taskiq / Dramatiq</a:t>
+                      </a:r>
+                    </a:p>
+                  </a:txBody>
+                  <a:tcPr marL="82296" marR="82296" marT="27432" marB="27432" anchor="ctr">
+                    <a:solidFill>
+                      <a:srgbClr val="F2F5FA"/>
+                    </a:solidFill>
+                  </a:tcPr>
+                </a:tc>
+              </a:tr>
+              <a:tr h="332994">
+                <a:tc>
+                  <a:txBody>
+                    <a:bodyPr wrap="square"/>
+                    <a:lstStyle/>
+                    <a:p>
+                      <a:r>
+                        <a:rPr sz="950" b="0">
+                          <a:solidFill>
+                            <a:srgbClr val="1B2738"/>
+                          </a:solidFill>
+                          <a:latin typeface="Segoe UI"/>
+                        </a:rPr>
+                        <a:t>Нужен порядок событий и replay</a:t>
+                      </a:r>
+                    </a:p>
+                  </a:txBody>
+                  <a:tcPr marL="82296" marR="82296" marT="27432" marB="27432" anchor="ctr">
+                    <a:solidFill>
+                      <a:srgbClr val="FFFFFF"/>
+                    </a:solidFill>
+                  </a:tcPr>
+                </a:tc>
+                <a:tc>
+                  <a:txBody>
+                    <a:bodyPr wrap="square"/>
+                    <a:lstStyle/>
+                    <a:p>
+                      <a:r>
+                        <a:rPr sz="950" b="0">
+                          <a:solidFill>
+                            <a:srgbClr val="1B2738"/>
+                          </a:solidFill>
+                          <a:latin typeface="Segoe UI"/>
+                        </a:rPr>
+                        <a:t>Kafka / Redis Streams — это не очередь задач</a:t>
+                      </a:r>
+                    </a:p>
+                  </a:txBody>
+                  <a:tcPr marL="82296" marR="82296" marT="27432" marB="27432" anchor="ctr">
+                    <a:solidFill>
+                      <a:srgbClr val="FFFFFF"/>
+                    </a:solidFill>
+                  </a:tcPr>
+                </a:tc>
+              </a:tr>
+              <a:tr h="332994">
+                <a:tc>
+                  <a:txBody>
+                    <a:bodyPr wrap="square"/>
+                    <a:lstStyle/>
+                    <a:p>
+                      <a:r>
+                        <a:rPr sz="950" b="0">
+                          <a:solidFill>
+                            <a:srgbClr val="1B2738"/>
+                          </a:solidFill>
+                          <a:latin typeface="Segoe UI"/>
+                        </a:rPr>
+                        <a:t>Долгие процессы с компенсациями</a:t>
+                      </a:r>
+                    </a:p>
+                  </a:txBody>
+                  <a:tcPr marL="82296" marR="82296" marT="27432" marB="27432" anchor="ctr">
+                    <a:solidFill>
+                      <a:srgbClr val="F2F5FA"/>
+                    </a:solidFill>
+                  </a:tcPr>
+                </a:tc>
+                <a:tc>
+                  <a:txBody>
+                    <a:bodyPr wrap="square"/>
+                    <a:lstStyle/>
+                    <a:p>
+                      <a:r>
+                        <a:rPr sz="950" b="0">
+                          <a:solidFill>
+                            <a:srgbClr val="1B2738"/>
+                          </a:solidFill>
+                          <a:latin typeface="Segoe UI"/>
+                        </a:rPr>
+                        <a:t>Temporal / Prefect</a:t>
+                      </a:r>
+                    </a:p>
+                  </a:txBody>
+                  <a:tcPr marL="82296" marR="82296" marT="27432" marB="27432" anchor="ctr">
+                    <a:solidFill>
+                      <a:srgbClr val="F2F5FA"/>
+                    </a:solidFill>
+                  </a:tcPr>
+                </a:tc>
+              </a:tr>
+            </a:tbl>
+          </a:graphicData>
+        </a:graphic>
+      </p:graphicFrame>
+      <p:sp>
+        <p:nvSpPr>
+          <p:cNvPr id="6" name="TextBox 5"/>
+          <p:cNvSpPr txBox="1"/>
+          <p:nvPr/>
+        </p:nvSpPr>
+        <p:spPr>
+          <a:xfrm>
+            <a:off x="566928" y="5139614"/>
+            <a:ext cx="11057839" cy="1038758"/>
+          </a:xfrm>
+          <a:prstGeom prst="rect">
+            <a:avLst/>
+          </a:prstGeom>
+          <a:noFill/>
+        </p:spPr>
+        <p:txBody>
+          <a:bodyPr wrap="square" lIns="0" rIns="0" tIns="0" bIns="0">
+            <a:spAutoFit/>
+          </a:bodyPr>
+          <a:lstStyle/>
+          <a:p>
+            <a:pPr marL="237744" indent="-219456">
+              <a:spcAft>
+                <a:spcPts val="532"/>
+              </a:spcAft>
+              <a:buClr>
+                <a:srgbClr val="2F6FED"/>
+              </a:buClr>
+              <a:buFont typeface="Arial"/>
+              <a:buChar char="■"/>
+            </a:pPr>
+            <a:r>
+              <a:rPr sz="1520" b="1">
+                <a:solidFill>
+                  <a:srgbClr val="1B2738"/>
+                </a:solidFill>
+                <a:latin typeface="Segoe UI"/>
+              </a:rPr>
+              <a:t>Идемпотентность — не опция</a:t>
+            </a:r>
+            <a:r>
+              <a:rPr sz="1520" b="0">
+                <a:solidFill>
+                  <a:srgbClr val="1B2738"/>
+                </a:solidFill>
+                <a:latin typeface="Segoe UI"/>
+              </a:rPr>
+              <a:t>, а условие корректности при at-least-once.</a:t>
+            </a:r>
+          </a:p>
+          <a:p>
+            <a:pPr marL="237744" indent="-219456">
+              <a:spcAft>
+                <a:spcPts val="532"/>
+              </a:spcAft>
+              <a:buClr>
+                <a:srgbClr val="2F6FED"/>
+              </a:buClr>
+              <a:buFont typeface="Arial"/>
+              <a:buChar char="■"/>
+            </a:pPr>
+            <a:r>
+              <a:rPr sz="1520" b="1">
+                <a:solidFill>
+                  <a:srgbClr val="1B2738"/>
+                </a:solidFill>
+                <a:latin typeface="Segoe UI"/>
+              </a:rPr>
+              <a:t>Умолчания фреймворков меняют гарантии и скорость в разы</a:t>
+            </a:r>
+            <a:r>
+              <a:rPr sz="1520" b="0">
+                <a:solidFill>
+                  <a:srgbClr val="1B2738"/>
+                </a:solidFill>
+                <a:latin typeface="Segoe UI"/>
+              </a:rPr>
+              <a:t> — их нужно выбирать осознанно.</a:t>
+            </a:r>
+          </a:p>
+          <a:p>
+            <a:pPr marL="237744" indent="-219456">
+              <a:spcAft>
+                <a:spcPts val="532"/>
+              </a:spcAft>
+              <a:buClr>
+                <a:srgbClr val="2F6FED"/>
+              </a:buClr>
+              <a:buFont typeface="Arial"/>
+              <a:buChar char="■"/>
+            </a:pPr>
+            <a:r>
+              <a:rPr sz="1520" b="1">
+                <a:solidFill>
+                  <a:srgbClr val="1B2738"/>
+                </a:solidFill>
+                <a:latin typeface="Segoe UI"/>
+              </a:rPr>
+              <a:t>Измерять, а не верить</a:t>
+            </a:r>
+            <a:r>
+              <a:rPr sz="1520" b="0">
+                <a:solidFill>
+                  <a:srgbClr val="1B2738"/>
+                </a:solidFill>
+                <a:latin typeface="Segoe UI"/>
+              </a:rPr>
+              <a:t>: разница RQ </a:t>
+            </a:r>
+            <a:r>
+              <a:rPr sz="1420" b="0">
+                <a:solidFill>
+                  <a:srgbClr val="E8590C"/>
+                </a:solidFill>
+                <a:latin typeface="Consolas"/>
+              </a:rPr>
+              <a:t>Worker</a:t>
+            </a:r>
+            <a:r>
+              <a:rPr sz="1520" b="0">
+                <a:solidFill>
+                  <a:srgbClr val="1B2738"/>
+                </a:solidFill>
+                <a:latin typeface="Segoe UI"/>
+              </a:rPr>
+              <a:t> и </a:t>
+            </a:r>
+            <a:r>
+              <a:rPr sz="1420" b="0">
+                <a:solidFill>
+                  <a:srgbClr val="E8590C"/>
+                </a:solidFill>
+                <a:latin typeface="Consolas"/>
+              </a:rPr>
+              <a:t>SimpleWorker</a:t>
+            </a:r>
+            <a:r>
+              <a:rPr sz="1520" b="0">
+                <a:solidFill>
+                  <a:srgbClr val="1B2738"/>
+                </a:solidFill>
+                <a:latin typeface="Segoe UI"/>
+              </a:rPr>
+              <a:t> — 20×, разница Redis и RabbitMQ на реальных задачах — 0 %.</a:t>
+            </a:r>
+          </a:p>
+        </p:txBody>
+      </p:sp>
+      <p:sp>
+        <p:nvSpPr>
+          <p:cNvPr id="7" name="TextBox 6"/>
+          <p:cNvSpPr txBox="1"/>
+          <p:nvPr/>
+        </p:nvSpPr>
+        <p:spPr>
+          <a:xfrm>
+            <a:off x="566928" y="6419088"/>
+            <a:ext cx="11057839" cy="274320"/>
+          </a:xfrm>
+          <a:prstGeom prst="rect">
+            <a:avLst/>
+          </a:prstGeom>
+          <a:noFill/>
+        </p:spPr>
+        <p:txBody>
+          <a:bodyPr wrap="square" lIns="0" rIns="0" tIns="0" bIns="0">
+            <a:spAutoFit/>
+          </a:bodyPr>
+          <a:lstStyle/>
+          <a:p>
+            <a:r>
+              <a:rPr sz="1000">
+                <a:solidFill>
+                  <a:srgbClr val="5B6B7C"/>
+                </a:solidFill>
+                <a:latin typeface="Segoe UI"/>
+              </a:rPr>
+              <a:t>Очереди сообщений и фоновые задачи в Python</a:t>
+            </a:r>
+          </a:p>
+        </p:txBody>
+      </p:sp>
+      <p:sp>
+        <p:nvSpPr>
+          <p:cNvPr id="8" name="TextBox 7"/>
+          <p:cNvSpPr txBox="1"/>
+          <p:nvPr/>
+        </p:nvSpPr>
+        <p:spPr>
+          <a:xfrm>
+            <a:off x="10710367" y="6419088"/>
+            <a:ext cx="914400" cy="274320"/>
+          </a:xfrm>
+          <a:prstGeom prst="rect">
+            <a:avLst/>
+          </a:prstGeom>
+          <a:noFill/>
+        </p:spPr>
+        <p:txBody>
+          <a:bodyPr wrap="square" lIns="0" rIns="0" tIns="0" bIns="0">
+            <a:spAutoFit/>
+          </a:bodyPr>
+          <a:lstStyle/>
+          <a:p>
+            <a:pPr algn="r"/>
+            <a:r>
+              <a:rPr sz="1000" b="1">
+                <a:solidFill>
+                  <a:srgbClr val="2F6FED"/>
+                </a:solidFill>
+                <a:latin typeface="Segoe UI"/>
+              </a:rPr>
+              <a:t>20</a:t>
+            </a:r>
+          </a:p>
+        </p:txBody>
+      </p:sp>
+    </p:spTree>
+  </p:cSld>
+  <p:clrMapOvr>
+    <a:masterClrMapping/>
+  </p:clrMapOvr>
+</p:sld>
+</file>
+
+<file path=ppt/slides/slide21.xml><?xml version="1.0" encoding="utf-8"?>
+<p:sld xmlns:a="http://schemas.openxmlformats.org/drawingml/2006/main" xmlns:p="http://schemas.openxmlformats.org/presentationml/2006/main" xmlns:r="http://schemas.openxmlformats.org/officeDocument/2006/relationships">
+  <p:cSld>
+    <p:bg>
+      <p:bgPr>
+        <a:solidFill>
+          <a:srgbClr val="FFFFFF"/>
+        </a:solidFill>
+        <a:effectLst/>
+      </p:bgPr>
+    </p:bg>
+    <p:spTree>
+      <p:nvGrpSpPr>
+        <p:cNvPr id="1" name=""/>
+        <p:cNvGrpSpPr/>
+        <p:nvPr/>
+      </p:nvGrpSpPr>
+      <p:grpSpPr/>
+      <p:sp>
+        <p:nvSpPr>
+          <p:cNvPr id="2" name="TextBox 1"/>
+          <p:cNvSpPr txBox="1"/>
+          <p:nvPr/>
+        </p:nvSpPr>
+        <p:spPr>
+          <a:xfrm>
+            <a:off x="566928" y="438912"/>
+            <a:ext cx="11057839" cy="777240"/>
+          </a:xfrm>
+          <a:prstGeom prst="rect">
+            <a:avLst/>
+          </a:prstGeom>
+          <a:noFill/>
+        </p:spPr>
+        <p:txBody>
+          <a:bodyPr wrap="square" lIns="0" rIns="0" tIns="0" bIns="0">
+            <a:spAutoFit/>
+          </a:bodyPr>
+          <a:lstStyle/>
+          <a:p>
+            <a:pPr algn="l"/>
+            <a:r>
+              <a:rPr sz="3000" b="1">
+                <a:solidFill>
+                  <a:srgbClr val="1B2738"/>
+                </a:solidFill>
+                <a:latin typeface="Segoe UI"/>
+              </a:rPr>
+              <a:t>Спасибо за внимание</a:t>
+            </a:r>
+          </a:p>
+        </p:txBody>
+      </p:sp>
+      <p:sp>
+        <p:nvSpPr>
+          <p:cNvPr id="3" name="Rectangle 2"/>
+          <p:cNvSpPr/>
+          <p:nvPr/>
+        </p:nvSpPr>
+        <p:spPr>
+          <a:xfrm>
+            <a:off x="566928" y="1170432"/>
+            <a:ext cx="1051560" cy="50800"/>
+          </a:xfrm>
+          <a:prstGeom prst="rect">
+            <a:avLst/>
+          </a:prstGeom>
+          <a:solidFill>
+            <a:srgbClr val="2F6FED"/>
+          </a:solidFill>
+          <a:ln>
+            <a:noFill/>
+          </a:ln>
+          <a:effectLst/>
+        </p:spPr>
+        <p:style>
+          <a:lnRef idx="1">
+            <a:schemeClr val="accent1"/>
+          </a:lnRef>
+          <a:fillRef idx="3">
+            <a:schemeClr val="accent1"/>
+          </a:fillRef>
+          <a:effectRef idx="2">
+            <a:schemeClr val="accent1"/>
+          </a:effectRef>
+          <a:fontRef idx="minor">
+            <a:schemeClr val="lt1"/>
+          </a:fontRef>
+        </p:style>
+        <p:txBody>
+          <a:bodyPr rtlCol="0" anchor="ctr"/>
+          <a:lstStyle/>
+          <a:p>
+            <a:pPr algn="ctr"/>
+          </a:p>
+        </p:txBody>
+      </p:sp>
+      <p:sp>
+        <p:nvSpPr>
+          <p:cNvPr id="4" name="TextBox 3"/>
+          <p:cNvSpPr txBox="1"/>
+          <p:nvPr/>
+        </p:nvSpPr>
+        <p:spPr>
+          <a:xfrm>
+            <a:off x="566928" y="1335024"/>
+            <a:ext cx="11057839" cy="365760"/>
+          </a:xfrm>
+          <a:prstGeom prst="rect">
+            <a:avLst/>
+          </a:prstGeom>
+          <a:noFill/>
+        </p:spPr>
+        <p:txBody>
+          <a:bodyPr wrap="square" lIns="0" rIns="0" tIns="0" bIns="0">
+            <a:spAutoFit/>
+          </a:bodyPr>
+          <a:lstStyle/>
+          <a:p>
+            <a:r>
+              <a:rPr sz="1500" b="0">
+                <a:solidFill>
+                  <a:srgbClr val="5B6B7C"/>
+                </a:solidFill>
+                <a:latin typeface="Segoe UI"/>
+              </a:rPr>
               <a:t>Вопросы</a:t>
             </a:r>
           </a:p>
@@ -12830,7 +13796,7 @@
                 </a:solidFill>
                 <a:latin typeface="Segoe UI"/>
               </a:rPr>
-              <a:t>20</a:t>
+              <a:t>21</a:t>
             </a:r>
           </a:p>
         </p:txBody>

--- a/slides/talk.pptx
+++ b/slides/talk.pptx
@@ -947,7 +947,12 @@
           <a:lstStyle/>
           <a:p>
             <a:r>
-              <a:t>Ключевое методическое решение — общий сборщик метрик: если читать AsyncResult у Celery и Job у RQ, мы будем сравнивать ещё и стоимость чтения результатов.</a:t>
+              <a:t>Ключевое методическое решение — общий сборщик метрик: каждая задача сама пишет timestamps в общий Redis-список, поэтому результат не зависит от особенностей result backend конкретного фреймворка.</a:t>
+            </a:r>
+          </a:p>
+          <a:p>
+            <a:r>
+              <a:t>Вторая важная вещь: очередь наполняется заранее, поэтому пропускная способность — это скорость воркеров, а не продьюсера.</a:t>
             </a:r>
           </a:p>
         </p:txBody>
@@ -1087,7 +1092,7 @@
           <a:lstStyle/>
           <a:p>
             <a:r>
-              <a:t>Обязательно проговорить оговорки: это не бенчмарк брокеров, а порядок величин и характер масштабирования на одной машине.</a:t>
+              <a:t>Оговорки: один хост, Docker Desktop/WSL2 (RTT до брокера ~100 мкс, fork дороже), один однопоточный продьюсер, очередь наполнена заранее — это верхняя граница пропускной способности.</a:t>
             </a:r>
           </a:p>
         </p:txBody>
@@ -1157,17 +1162,12 @@
           <a:lstStyle/>
           <a:p>
             <a:r>
-              <a:t>Этот слайд — про то, что с собственным результатом нужно спорить. Диагностика воспроизводима: bench/diagnose.py, раздел «Аудит» в docs/experiment.md.</a:t>
-            </a:r>
-          </a:p>
-          <a:p>
-            <a:r>
-              <a:t>Данные матрицы при этом корректны: во всех 135 прогонах число живых воркеров совпало с ожидаемым, разброс между повторами — 2 % (максимум 17 %), то есть меньше сравниваемых разниц.</a:t>
-            </a:r>
-          </a:p>
-          <a:p>
-            <a:r>
-              <a:t>Что стоило сделать иначе: отдельный Redis под результаты и метрики, прогон без событий Flower, сравнение при одинаковых гарантиях публикации.</a:t>
+              <a:t>Диагностика воспроизводима: bench/diagnose.py меряет потолок Redis, цену публикации в Celery и цену publisher confirms. Разбор — docs/experiment.md, раздел «Что было не так в первой версии».</a:t>
+            </a:r>
+          </a:p>
+          <a:p>
+            <a:r>
+              <a:t>Это лучший слайд для вопроса «а вы уверены в своих цифрах»: сначала проверил данные (135/135 прогонов, разброс 1 %), потом механику, потом переснял матрицу.</a:t>
             </a:r>
           </a:p>
         </p:txBody>
@@ -1517,7 +1517,7 @@
           <a:lstStyle/>
           <a:p>
             <a:r>
-              <a:t>Подчеркнуть: Redis-транспорт Celery надстраивает AMQP-подобную семантику поверх списков — отсюда и накладные расходы на постановку, которые видны в эксперименте (900 msg/s против 1600 на RabbitMQ).</a:t>
+              <a:t>Подчеркнуть: Redis-транспорт Celery надстраивает AMQP-подобную семантику поверх списков, и каждая операция ждёт ответа сервера — отсюда накладные расходы на постановку (1583 msg/s против 2333 на RabbitMQ). Но как только RabbitMQ начинает подтверждать публикацию, он проигрывает Redis в 7,5 раза.</a:t>
             </a:r>
           </a:p>
         </p:txBody>
@@ -6242,7 +6242,7 @@
                 </a:solidFill>
                 <a:latin typeface="Segoe UI"/>
               </a:rPr>
-              <a:t> ≈ 75 мс на задачу в Docker Desktop — на микрозадачах это в 20 раз медленнее Celery. </a:t>
+              <a:t> ≈ 72 мс на задачу в Docker Desktop — на микрозадачах это в 23 раза медленнее Celery. </a:t>
             </a:r>
             <a:r>
               <a:rPr sz="1500" b="0">
@@ -7333,7 +7333,7 @@
                 </a:solidFill>
                 <a:latin typeface="Segoe UI"/>
               </a:rPr>
-              <a:t>×3,4–4,1</a:t>
+              <a:t>×3,0–4,1</a:t>
             </a:r>
             <a:r>
               <a:rPr sz="1500" b="0">
@@ -7342,7 +7342,7 @@
                 </a:solidFill>
                 <a:latin typeface="Segoe UI"/>
               </a:rPr>
-              <a:t> на реальных задачах.</a:t>
+              <a:t> на всех видах задач.</a:t>
             </a:r>
           </a:p>
           <a:p>
@@ -9162,7 +9162,7 @@
                 </a:solidFill>
                 <a:latin typeface="Segoe UI"/>
               </a:rPr>
-              <a:t>4 конфигурации × 3 типа задач × 3 масштаба × 3 повтора = 135 прогонов, 81 минута</a:t>
+              <a:t>5 конфигураций × 3 типа задач × 1/2/4 воркера × 3 повтора = 135 прогонов, 89 минут</a:t>
             </a:r>
           </a:p>
         </p:txBody>
@@ -9176,8 +9176,8 @@
           <p:nvPr/>
         </p:nvGraphicFramePr>
         <p:xfrm>
-          <a:off x="566928" y="1965747"/>
-          <a:ext cx="11057838" cy="1948280"/>
+          <a:off x="566928" y="1893633"/>
+          <a:ext cx="11057838" cy="2225280"/>
         </p:xfrm>
         <a:graphic>
           <a:graphicData uri="http://schemas.openxmlformats.org/drawingml/2006/table">
@@ -9186,17 +9186,17 @@
                 <a:tableStyleId>{5C22544A-7EE6-4342-B048-85BDC9FD1C3A}</a:tableStyleId>
               </a:tblPr>
               <a:tblGrid>
-                <a:gridCol w="4130036"/>
-                <a:gridCol w="6927802"/>
+                <a:gridCol w="3836393"/>
+                <a:gridCol w="7221445"/>
               </a:tblGrid>
-              <a:tr h="389656">
+              <a:tr h="370880">
                 <a:tc>
                   <a:txBody>
                     <a:bodyPr wrap="square"/>
                     <a:lstStyle/>
                     <a:p>
                       <a:r>
-                        <a:rPr sz="1288" b="1">
+                        <a:rPr sz="1176" b="1">
                           <a:solidFill>
                             <a:srgbClr val="FFFFFF"/>
                           </a:solidFill>
@@ -9218,7 +9218,7 @@
                     <a:lstStyle/>
                     <a:p>
                       <a:r>
-                        <a:rPr sz="1288" b="1">
+                        <a:rPr sz="1176" b="1">
                           <a:solidFill>
                             <a:srgbClr val="FFFFFF"/>
                           </a:solidFill>
@@ -9235,14 +9235,14 @@
                   </a:tcPr>
                 </a:tc>
               </a:tr>
-              <a:tr h="389656">
+              <a:tr h="370880">
                 <a:tc>
                   <a:txBody>
                     <a:bodyPr wrap="square"/>
                     <a:lstStyle/>
                     <a:p>
                       <a:r>
-                        <a:rPr sz="1288" b="0">
+                        <a:rPr sz="1176" b="0">
                           <a:solidFill>
                             <a:srgbClr val="1B2738"/>
                           </a:solidFill>
@@ -9264,7 +9264,7 @@
                     <a:lstStyle/>
                     <a:p>
                       <a:r>
-                        <a:rPr sz="1288" b="0">
+                        <a:rPr sz="1176" b="0">
                           <a:solidFill>
                             <a:srgbClr val="1B2738"/>
                           </a:solidFill>
@@ -9273,7 +9273,7 @@
                         <a:t>prefork, </a:t>
                       </a:r>
                       <a:r>
-                        <a:rPr sz="1188" b="0">
+                        <a:rPr sz="1076" b="0">
                           <a:solidFill>
                             <a:srgbClr val="E8590C"/>
                           </a:solidFill>
@@ -9282,7 +9282,7 @@
                         <a:t>concurrency=1</a:t>
                       </a:r>
                       <a:r>
-                        <a:rPr sz="1288" b="0">
+                        <a:rPr sz="1176" b="0">
                           <a:solidFill>
                             <a:srgbClr val="1B2738"/>
                           </a:solidFill>
@@ -9291,7 +9291,7 @@
                         <a:t>, </a:t>
                       </a:r>
                       <a:r>
-                        <a:rPr sz="1188" b="0">
+                        <a:rPr sz="1076" b="0">
                           <a:solidFill>
                             <a:srgbClr val="E8590C"/>
                           </a:solidFill>
@@ -9300,7 +9300,7 @@
                         <a:t>acks_late</a:t>
                       </a:r>
                       <a:r>
-                        <a:rPr sz="1288" b="0">
+                        <a:rPr sz="1176" b="0">
                           <a:solidFill>
                             <a:srgbClr val="1B2738"/>
                           </a:solidFill>
@@ -9309,7 +9309,7 @@
                         <a:t>, </a:t>
                       </a:r>
                       <a:r>
-                        <a:rPr sz="1188" b="0">
+                        <a:rPr sz="1076" b="0">
                           <a:solidFill>
                             <a:srgbClr val="E8590C"/>
                           </a:solidFill>
@@ -9326,14 +9326,14 @@
                   </a:tcPr>
                 </a:tc>
               </a:tr>
-              <a:tr h="389656">
+              <a:tr h="370880">
                 <a:tc>
                   <a:txBody>
                     <a:bodyPr wrap="square"/>
                     <a:lstStyle/>
                     <a:p>
                       <a:r>
-                        <a:rPr sz="1288" b="0">
+                        <a:rPr sz="1176" b="0">
                           <a:solidFill>
                             <a:srgbClr val="1B2738"/>
                           </a:solidFill>
@@ -9355,7 +9355,7 @@
                     <a:lstStyle/>
                     <a:p>
                       <a:r>
-                        <a:rPr sz="1288" b="0">
+                        <a:rPr sz="1176" b="0">
                           <a:solidFill>
                             <a:srgbClr val="1B2738"/>
                           </a:solidFill>
@@ -9372,38 +9372,20 @@
                   </a:tcPr>
                 </a:tc>
               </a:tr>
-              <a:tr h="389656">
+              <a:tr h="370880">
                 <a:tc>
                   <a:txBody>
                     <a:bodyPr wrap="square"/>
                     <a:lstStyle/>
                     <a:p>
                       <a:r>
-                        <a:rPr sz="1288" b="0">
+                        <a:rPr sz="1176" b="0">
                           <a:solidFill>
                             <a:srgbClr val="1B2738"/>
                           </a:solidFill>
                           <a:latin typeface="Segoe UI"/>
                         </a:rPr>
-                        <a:t>RQ + Redis (</a:t>
-                      </a:r>
-                      <a:r>
-                        <a:rPr sz="1188" b="0">
-                          <a:solidFill>
-                            <a:srgbClr val="E8590C"/>
-                          </a:solidFill>
-                          <a:latin typeface="Consolas"/>
-                        </a:rPr>
-                        <a:t>Worker</a:t>
-                      </a:r>
-                      <a:r>
-                        <a:rPr sz="1288" b="0">
-                          <a:solidFill>
-                            <a:srgbClr val="1B2738"/>
-                          </a:solidFill>
-                          <a:latin typeface="Segoe UI"/>
-                        </a:rPr>
-                        <a:t>)</a:t>
+                        <a:t>Celery + RabbitMQ + confirms</a:t>
                       </a:r>
                     </a:p>
                   </a:txBody>
@@ -9419,22 +9401,13 @@
                     <a:lstStyle/>
                     <a:p>
                       <a:r>
-                        <a:rPr sz="1288" b="1">
+                        <a:rPr sz="1176" b="0">
                           <a:solidFill>
                             <a:srgbClr val="1B2738"/>
                           </a:solidFill>
                           <a:latin typeface="Segoe UI"/>
                         </a:rPr>
-                        <a:t>fork на каждую задачу</a:t>
-                      </a:r>
-                      <a:r>
-                        <a:rPr sz="1288" b="0">
-                          <a:solidFill>
-                            <a:srgbClr val="1B2738"/>
-                          </a:solidFill>
-                          <a:latin typeface="Segoe UI"/>
-                        </a:rPr>
-                        <a:t> — умолчание RQ</a:t>
+                        <a:t>то же + подтверждение публикации — равные с Redis гарантии</a:t>
                       </a:r>
                     </a:p>
                   </a:txBody>
@@ -9445,14 +9418,14 @@
                   </a:tcPr>
                 </a:tc>
               </a:tr>
-              <a:tr h="389656">
+              <a:tr h="370880">
                 <a:tc>
                   <a:txBody>
                     <a:bodyPr wrap="square"/>
                     <a:lstStyle/>
                     <a:p>
                       <a:r>
-                        <a:rPr sz="1288" b="0">
+                        <a:rPr sz="1176" b="0">
                           <a:solidFill>
                             <a:srgbClr val="1B2738"/>
                           </a:solidFill>
@@ -9461,16 +9434,16 @@
                         <a:t>RQ + Redis (</a:t>
                       </a:r>
                       <a:r>
-                        <a:rPr sz="1188" b="0">
+                        <a:rPr sz="1076" b="0">
                           <a:solidFill>
                             <a:srgbClr val="E8590C"/>
                           </a:solidFill>
                           <a:latin typeface="Consolas"/>
                         </a:rPr>
-                        <a:t>SimpleWorker</a:t>
-                      </a:r>
-                      <a:r>
-                        <a:rPr sz="1288" b="0">
+                        <a:t>Worker</a:t>
+                      </a:r>
+                      <a:r>
+                        <a:rPr sz="1176" b="0">
                           <a:solidFill>
                             <a:srgbClr val="1B2738"/>
                           </a:solidFill>
@@ -9492,22 +9465,22 @@
                     <a:lstStyle/>
                     <a:p>
                       <a:r>
-                        <a:rPr sz="1288" b="0">
+                        <a:rPr sz="1176" b="1">
                           <a:solidFill>
                             <a:srgbClr val="1B2738"/>
                           </a:solidFill>
                           <a:latin typeface="Segoe UI"/>
                         </a:rPr>
-                        <a:t>задача в процессе воркера — аналог </a:t>
-                      </a:r>
-                      <a:r>
-                        <a:rPr sz="1188" b="0">
-                          <a:solidFill>
-                            <a:srgbClr val="E8590C"/>
-                          </a:solidFill>
-                          <a:latin typeface="Consolas"/>
-                        </a:rPr>
-                        <a:t>--pool=solo</a:t>
+                        <a:t>fork на каждую задачу</a:t>
+                      </a:r>
+                      <a:r>
+                        <a:rPr sz="1176" b="0">
+                          <a:solidFill>
+                            <a:srgbClr val="1B2738"/>
+                          </a:solidFill>
+                          <a:latin typeface="Segoe UI"/>
+                        </a:rPr>
+                        <a:t> — умолчание RQ</a:t>
                       </a:r>
                     </a:p>
                   </a:txBody>
@@ -9518,6 +9491,79 @@
                   </a:tcPr>
                 </a:tc>
               </a:tr>
+              <a:tr h="370880">
+                <a:tc>
+                  <a:txBody>
+                    <a:bodyPr wrap="square"/>
+                    <a:lstStyle/>
+                    <a:p>
+                      <a:r>
+                        <a:rPr sz="1176" b="0">
+                          <a:solidFill>
+                            <a:srgbClr val="1B2738"/>
+                          </a:solidFill>
+                          <a:latin typeface="Segoe UI"/>
+                        </a:rPr>
+                        <a:t>RQ + Redis (</a:t>
+                      </a:r>
+                      <a:r>
+                        <a:rPr sz="1076" b="0">
+                          <a:solidFill>
+                            <a:srgbClr val="E8590C"/>
+                          </a:solidFill>
+                          <a:latin typeface="Consolas"/>
+                        </a:rPr>
+                        <a:t>SimpleWorker</a:t>
+                      </a:r>
+                      <a:r>
+                        <a:rPr sz="1176" b="0">
+                          <a:solidFill>
+                            <a:srgbClr val="1B2738"/>
+                          </a:solidFill>
+                          <a:latin typeface="Segoe UI"/>
+                        </a:rPr>
+                        <a:t>)</a:t>
+                      </a:r>
+                    </a:p>
+                  </a:txBody>
+                  <a:tcPr marL="82296" marR="82296" marT="27432" marB="27432" anchor="ctr">
+                    <a:solidFill>
+                      <a:srgbClr val="FFFFFF"/>
+                    </a:solidFill>
+                  </a:tcPr>
+                </a:tc>
+                <a:tc>
+                  <a:txBody>
+                    <a:bodyPr wrap="square"/>
+                    <a:lstStyle/>
+                    <a:p>
+                      <a:r>
+                        <a:rPr sz="1176" b="0">
+                          <a:solidFill>
+                            <a:srgbClr val="1B2738"/>
+                          </a:solidFill>
+                          <a:latin typeface="Segoe UI"/>
+                        </a:rPr>
+                        <a:t>задача в процессе воркера — аналог </a:t>
+                      </a:r>
+                      <a:r>
+                        <a:rPr sz="1076" b="0">
+                          <a:solidFill>
+                            <a:srgbClr val="E8590C"/>
+                          </a:solidFill>
+                          <a:latin typeface="Consolas"/>
+                        </a:rPr>
+                        <a:t>--pool=solo</a:t>
+                      </a:r>
+                    </a:p>
+                  </a:txBody>
+                  <a:tcPr marL="82296" marR="82296" marT="27432" marB="27432" anchor="ctr">
+                    <a:solidFill>
+                      <a:srgbClr val="FFFFFF"/>
+                    </a:solidFill>
+                  </a:tcPr>
+                </a:tc>
+              </a:tr>
             </a:tbl>
           </a:graphicData>
         </a:graphic>
@@ -9530,8 +9576,8 @@
         </p:nvSpPr>
         <p:spPr>
           <a:xfrm>
-            <a:off x="566928" y="4188347"/>
-            <a:ext cx="11057839" cy="1892625"/>
+            <a:off x="566928" y="4393233"/>
+            <a:ext cx="11057839" cy="1759854"/>
           </a:xfrm>
           <a:prstGeom prst="rect">
             <a:avLst/>
@@ -9546,7 +9592,7 @@
           <a:p>
             <a:pPr marL="237744" indent="-219456">
               <a:spcAft>
-                <a:spcPts val="644"/>
+                <a:spcPts val="588"/>
               </a:spcAft>
               <a:buClr>
                 <a:srgbClr val="2F6FED"/>
@@ -9555,7 +9601,7 @@
               <a:buChar char="■"/>
             </a:pPr>
             <a:r>
-              <a:rPr sz="1518" b="1">
+              <a:rPr sz="1386" b="1">
                 <a:solidFill>
                   <a:srgbClr val="1B2738"/>
                 </a:solidFill>
@@ -9564,7 +9610,7 @@
               <a:t>Задачи</a:t>
             </a:r>
             <a:r>
-              <a:rPr sz="1518" b="0">
+              <a:rPr sz="1386" b="0">
                 <a:solidFill>
                   <a:srgbClr val="1B2738"/>
                 </a:solidFill>
@@ -9573,7 +9619,7 @@
               <a:t>: </a:t>
             </a:r>
             <a:r>
-              <a:rPr sz="1418" b="0">
+              <a:rPr sz="1286" b="0">
                 <a:solidFill>
                   <a:srgbClr val="E8590C"/>
                 </a:solidFill>
@@ -9582,7 +9628,7 @@
               <a:t>noop</a:t>
             </a:r>
             <a:r>
-              <a:rPr sz="1518" b="0">
+              <a:rPr sz="1386" b="0">
                 <a:solidFill>
                   <a:srgbClr val="1B2738"/>
                 </a:solidFill>
@@ -9591,7 +9637,7 @@
               <a:t> (чистые накладные расходы), </a:t>
             </a:r>
             <a:r>
-              <a:rPr sz="1418" b="0">
+              <a:rPr sz="1286" b="0">
                 <a:solidFill>
                   <a:srgbClr val="E8590C"/>
                 </a:solidFill>
@@ -9600,16 +9646,16 @@
               <a:t>cpu_small</a:t>
             </a:r>
             <a:r>
-              <a:rPr sz="1518" b="0">
-                <a:solidFill>
-                  <a:srgbClr val="1B2738"/>
-                </a:solidFill>
-                <a:latin typeface="Segoe UI"/>
-              </a:rPr>
-              <a:t> (агрегация 10 000 строк + график, ≈60 мс CPU), </a:t>
-            </a:r>
-            <a:r>
-              <a:rPr sz="1418" b="0">
+              <a:rPr sz="1386" b="0">
+                <a:solidFill>
+                  <a:srgbClr val="1B2738"/>
+                </a:solidFill>
+                <a:latin typeface="Segoe UI"/>
+              </a:rPr>
+              <a:t> (агрегация 10 000 строк + график, ≈46 мс CPU), </a:t>
+            </a:r>
+            <a:r>
+              <a:rPr sz="1286" b="0">
                 <a:solidFill>
                   <a:srgbClr val="E8590C"/>
                 </a:solidFill>
@@ -9618,7 +9664,7 @@
               <a:t>io_sleep</a:t>
             </a:r>
             <a:r>
-              <a:rPr sz="1518" b="0">
+              <a:rPr sz="1386" b="0">
                 <a:solidFill>
                   <a:srgbClr val="1B2738"/>
                 </a:solidFill>
@@ -9630,7 +9676,7 @@
           <a:p>
             <a:pPr marL="237744" indent="-219456">
               <a:spcAft>
-                <a:spcPts val="644"/>
+                <a:spcPts val="588"/>
               </a:spcAft>
               <a:buClr>
                 <a:srgbClr val="2F6FED"/>
@@ -9639,64 +9685,28 @@
               <a:buChar char="■"/>
             </a:pPr>
             <a:r>
-              <a:rPr sz="1518" b="1">
-                <a:solidFill>
-                  <a:srgbClr val="1B2738"/>
-                </a:solidFill>
-                <a:latin typeface="Segoe UI"/>
-              </a:rPr>
-              <a:t>Нагрузка</a:t>
-            </a:r>
-            <a:r>
-              <a:rPr sz="1518" b="0">
-                <a:solidFill>
-                  <a:srgbClr val="1B2738"/>
-                </a:solidFill>
-                <a:latin typeface="Segoe UI"/>
-              </a:rPr>
-              <a:t>: N = 1000 (для </a:t>
-            </a:r>
-            <a:r>
-              <a:rPr sz="1418" b="0">
-                <a:solidFill>
-                  <a:srgbClr val="E8590C"/>
-                </a:solidFill>
-                <a:latin typeface="Consolas"/>
-              </a:rPr>
-              <a:t>noop</a:t>
-            </a:r>
-            <a:r>
-              <a:rPr sz="1518" b="0">
-                <a:solidFill>
-                  <a:srgbClr val="1B2738"/>
-                </a:solidFill>
-                <a:latin typeface="Segoe UI"/>
-              </a:rPr>
-              <a:t> ещё 5000); воркеров 1 / 2 / 4 — отдельные контейнеры (</a:t>
-            </a:r>
-            <a:r>
-              <a:rPr sz="1418" b="0">
-                <a:solidFill>
-                  <a:srgbClr val="E8590C"/>
-                </a:solidFill>
-                <a:latin typeface="Consolas"/>
-              </a:rPr>
-              <a:t>docker compose --scale</a:t>
-            </a:r>
-            <a:r>
-              <a:rPr sz="1518" b="0">
-                <a:solidFill>
-                  <a:srgbClr val="1B2738"/>
-                </a:solidFill>
-                <a:latin typeface="Segoe UI"/>
-              </a:rPr>
-              <a:t>).</a:t>
+              <a:rPr sz="1386" b="1">
+                <a:solidFill>
+                  <a:srgbClr val="1B2738"/>
+                </a:solidFill>
+                <a:latin typeface="Segoe UI"/>
+              </a:rPr>
+              <a:t>Три фазы — три разные величины</a:t>
+            </a:r>
+            <a:r>
+              <a:rPr sz="1386" b="0">
+                <a:solidFill>
+                  <a:srgbClr val="1B2738"/>
+                </a:solidFill>
+                <a:latin typeface="Segoe UI"/>
+              </a:rPr>
+              <a:t>: постановка в остановленную очередь → разбор заведомо полной очереди → задержка одной задачи на пустой очереди. Иначе на микрозадачах «пропускная способность» измеряет продьюсера, а «задержка» — позицию в очереди.</a:t>
             </a:r>
           </a:p>
           <a:p>
             <a:pPr marL="237744" indent="-219456">
               <a:spcAft>
-                <a:spcPts val="644"/>
+                <a:spcPts val="588"/>
               </a:spcAft>
               <a:buClr>
                 <a:srgbClr val="2F6FED"/>
@@ -9705,28 +9715,64 @@
               <a:buChar char="■"/>
             </a:pPr>
             <a:r>
-              <a:rPr sz="1518" b="1">
-                <a:solidFill>
-                  <a:srgbClr val="1B2738"/>
-                </a:solidFill>
-                <a:latin typeface="Segoe UI"/>
-              </a:rPr>
-              <a:t>Метрики</a:t>
-            </a:r>
-            <a:r>
-              <a:rPr sz="1518" b="0">
-                <a:solidFill>
-                  <a:srgbClr val="1B2738"/>
-                </a:solidFill>
-                <a:latin typeface="Segoe UI"/>
-              </a:rPr>
-              <a:t>: скорость постановки, throughput, задержка p50/p95/p99 от постановки до завершения. Каждая задача сама пишет timestamps в Redis — сборщик один для всех фреймворков, результат не зависит от особенностей result backend.</a:t>
+              <a:rPr sz="1386" b="1">
+                <a:solidFill>
+                  <a:srgbClr val="1B2738"/>
+                </a:solidFill>
+                <a:latin typeface="Segoe UI"/>
+              </a:rPr>
+              <a:t>Чистота замера</a:t>
+            </a:r>
+            <a:r>
+              <a:rPr sz="1386" b="0">
+                <a:solidFill>
+                  <a:srgbClr val="1B2738"/>
+                </a:solidFill>
+                <a:latin typeface="Segoe UI"/>
+              </a:rPr>
+              <a:t>: result backend и метрики — на отдельном Redis, события Flower выключены, продьюсер в отдельном контейнере, </a:t>
+            </a:r>
+            <a:r>
+              <a:rPr sz="1286" b="0">
+                <a:solidFill>
+                  <a:srgbClr val="E8590C"/>
+                </a:solidFill>
+                <a:latin typeface="Consolas"/>
+              </a:rPr>
+              <a:t>beat</a:t>
+            </a:r>
+            <a:r>
+              <a:rPr sz="1386" b="0">
+                <a:solidFill>
+                  <a:srgbClr val="1B2738"/>
+                </a:solidFill>
+                <a:latin typeface="Segoe UI"/>
+              </a:rPr>
+              <a:t> и </a:t>
+            </a:r>
+            <a:r>
+              <a:rPr sz="1286" b="0">
+                <a:solidFill>
+                  <a:srgbClr val="E8590C"/>
+                </a:solidFill>
+                <a:latin typeface="Consolas"/>
+              </a:rPr>
+              <a:t>flower</a:t>
+            </a:r>
+            <a:r>
+              <a:rPr sz="1386" b="0">
+                <a:solidFill>
+                  <a:srgbClr val="1B2738"/>
+                </a:solidFill>
+                <a:latin typeface="Segoe UI"/>
+              </a:rPr>
+              <a:t> погашены.</a:t>
             </a:r>
           </a:p>
           <a:p>
             <a:pPr marL="237744" indent="-219456">
               <a:spcAft>
-                <a:spcPts val="644"/>
+                <a:spcPts val="588"/>
               </a:spcAft>
               <a:buClr>
                 <a:srgbClr val="2F6FED"/>
@@ -9735,13 +9781,13 @@
               <a:buChar char="■"/>
             </a:pPr>
             <a:r>
-              <a:rPr sz="1518" b="0">
-                <a:solidFill>
-                  <a:srgbClr val="1B2738"/>
-                </a:solidFill>
-                <a:latin typeface="Segoe UI"/>
-              </a:rPr>
-              <a:t>Медиана трёх повторов; перед каждым прогоном очередь очищается и ожидается нужное число живых воркеров.</a:t>
+              <a:rPr sz="1386" b="0">
+                <a:solidFill>
+                  <a:srgbClr val="1B2738"/>
+                </a:solidFill>
+                <a:latin typeface="Segoe UI"/>
+              </a:rPr>
+              <a:t>Медиана трёх повторов; 135/135 прогонов с нужным числом живых воркеров, разброс между повторами — 1 %.</a:t>
             </a:r>
           </a:p>
         </p:txBody>
@@ -10271,7 +10317,7 @@
                 </a:solidFill>
                 <a:latin typeface="Segoe UI"/>
               </a:rPr>
-              <a:t>N = 1000, медиана трёх повторов, задач в секунду</a:t>
+              <a:t>Медиана трёх повторов; пропускная способность — разбор заранее наполненной очереди</a:t>
             </a:r>
           </a:p>
         </p:txBody>
@@ -10285,8 +10331,8 @@
           <p:nvPr/>
         </p:nvGraphicFramePr>
         <p:xfrm>
-          <a:off x="566928" y="1932433"/>
-          <a:ext cx="11057836" cy="1901340"/>
+          <a:off x="566928" y="1832276"/>
+          <a:ext cx="11057836" cy="2281608"/>
         </p:xfrm>
         <a:graphic>
           <a:graphicData uri="http://schemas.openxmlformats.org/drawingml/2006/table">
@@ -10295,10 +10341,11 @@
                 <a:tableStyleId>{5C22544A-7EE6-4342-B048-85BDC9FD1C3A}</a:tableStyleId>
               </a:tblPr>
               <a:tblGrid>
-                <a:gridCol w="2923336"/>
-                <a:gridCol w="2287828"/>
-                <a:gridCol w="2923336"/>
-                <a:gridCol w="2923336"/>
+                <a:gridCol w="3241090"/>
+                <a:gridCol w="1715871"/>
+                <a:gridCol w="2192502"/>
+                <a:gridCol w="2192502"/>
+                <a:gridCol w="1715871"/>
               </a:tblGrid>
               <a:tr h="380268">
                 <a:tc>
@@ -10380,6 +10427,28 @@
                           <a:latin typeface="Segoe UI"/>
                         </a:rPr>
                         <a:t>Постановка, msg/s</a:t>
+                      </a:r>
+                    </a:p>
+                  </a:txBody>
+                  <a:tcPr marL="82296" marR="82296" marT="27432" marB="27432" anchor="ctr">
+                    <a:solidFill>
+                      <a:srgbClr val="2F6FED"/>
+                    </a:solidFill>
+                  </a:tcPr>
+                </a:tc>
+                <a:tc>
+                  <a:txBody>
+                    <a:bodyPr wrap="square"/>
+                    <a:lstStyle/>
+                    <a:p>
+                      <a:r>
+                        <a:rPr sz="1232" b="1">
+                          <a:solidFill>
+                            <a:srgbClr val="FFFFFF"/>
+                          </a:solidFill>
+                          <a:latin typeface="Segoe UI"/>
+                        </a:rPr>
+                        <a:t>Задержка p50</a:t>
                       </a:r>
                     </a:p>
                   </a:txBody>
@@ -10425,7 +10494,7 @@
                           </a:solidFill>
                           <a:latin typeface="Segoe UI"/>
                         </a:rPr>
-                        <a:t>302 → 739</a:t>
+                        <a:t>434 → 1497</a:t>
                       </a:r>
                     </a:p>
                   </a:txBody>
@@ -10447,7 +10516,7 @@
                           </a:solidFill>
                           <a:latin typeface="Segoe UI"/>
                         </a:rPr>
-                        <a:t>17 → 63</a:t>
+                        <a:t>20 → 67</a:t>
                       </a:r>
                     </a:p>
                   </a:txBody>
@@ -10469,7 +10538,29 @@
                           </a:solidFill>
                           <a:latin typeface="Segoe UI"/>
                         </a:rPr>
-                        <a:t>≈900</a:t>
+                        <a:t>1583</a:t>
+                      </a:r>
+                    </a:p>
+                  </a:txBody>
+                  <a:tcPr marL="82296" marR="82296" marT="27432" marB="27432" anchor="ctr">
+                    <a:solidFill>
+                      <a:srgbClr val="FFFFFF"/>
+                    </a:solidFill>
+                  </a:tcPr>
+                </a:tc>
+                <a:tc>
+                  <a:txBody>
+                    <a:bodyPr wrap="square"/>
+                    <a:lstStyle/>
+                    <a:p>
+                      <a:r>
+                        <a:rPr sz="1232" b="0">
+                          <a:solidFill>
+                            <a:srgbClr val="1B2738"/>
+                          </a:solidFill>
+                          <a:latin typeface="Segoe UI"/>
+                        </a:rPr>
+                        <a:t>1,8 мс</a:t>
                       </a:r>
                     </a:p>
                   </a:txBody>
@@ -10515,7 +10606,7 @@
                           </a:solidFill>
                           <a:latin typeface="Segoe UI"/>
                         </a:rPr>
-                        <a:t>474 → 1336</a:t>
+                        <a:t>560 → 1744</a:t>
                       </a:r>
                     </a:p>
                   </a:txBody>
@@ -10537,7 +10628,7 @@
                           </a:solidFill>
                           <a:latin typeface="Segoe UI"/>
                         </a:rPr>
-                        <a:t>19 → 67</a:t>
+                        <a:t>20 → 67</a:t>
                       </a:r>
                     </a:p>
                   </a:txBody>
@@ -10559,7 +10650,29 @@
                           </a:solidFill>
                           <a:latin typeface="Segoe UI"/>
                         </a:rPr>
-                        <a:t>≈1600</a:t>
+                        <a:t>2333</a:t>
+                      </a:r>
+                    </a:p>
+                  </a:txBody>
+                  <a:tcPr marL="82296" marR="82296" marT="27432" marB="27432" anchor="ctr">
+                    <a:solidFill>
+                      <a:srgbClr val="F2F5FA"/>
+                    </a:solidFill>
+                  </a:tcPr>
+                </a:tc>
+                <a:tc>
+                  <a:txBody>
+                    <a:bodyPr wrap="square"/>
+                    <a:lstStyle/>
+                    <a:p>
+                      <a:r>
+                        <a:rPr sz="1232" b="0">
+                          <a:solidFill>
+                            <a:srgbClr val="1B2738"/>
+                          </a:solidFill>
+                          <a:latin typeface="Segoe UI"/>
+                        </a:rPr>
+                        <a:t>1,8 мс</a:t>
                       </a:r>
                     </a:p>
                   </a:txBody>
@@ -10583,25 +10696,7 @@
                           </a:solidFill>
                           <a:latin typeface="Segoe UI"/>
                         </a:rPr>
-                        <a:t>RQ </a:t>
-                      </a:r>
-                      <a:r>
-                        <a:rPr sz="1132" b="0">
-                          <a:solidFill>
-                            <a:srgbClr val="E8590C"/>
-                          </a:solidFill>
-                          <a:latin typeface="Consolas"/>
-                        </a:rPr>
-                        <a:t>Worker</a:t>
-                      </a:r>
-                      <a:r>
-                        <a:rPr sz="1232" b="0">
-                          <a:solidFill>
-                            <a:srgbClr val="1B2738"/>
-                          </a:solidFill>
-                          <a:latin typeface="Segoe UI"/>
-                        </a:rPr>
-                        <a:t> (fork)</a:t>
+                        <a:t>Celery + RabbitMQ + confirms</a:t>
                       </a:r>
                     </a:p>
                   </a:txBody>
@@ -10623,7 +10718,7 @@
                           </a:solidFill>
                           <a:latin typeface="Segoe UI"/>
                         </a:rPr>
-                        <a:t>13 → 44</a:t>
+                        <a:t>554 → 1649</a:t>
                       </a:r>
                     </a:p>
                   </a:txBody>
@@ -10645,7 +10740,7 @@
                           </a:solidFill>
                           <a:latin typeface="Segoe UI"/>
                         </a:rPr>
-                        <a:t>7 → 23</a:t>
+                        <a:t>20 → 68</a:t>
                       </a:r>
                     </a:p>
                   </a:txBody>
@@ -10661,13 +10756,35 @@
                     <a:lstStyle/>
                     <a:p>
                       <a:r>
+                        <a:rPr sz="1232" b="1">
+                          <a:solidFill>
+                            <a:srgbClr val="1B2738"/>
+                          </a:solidFill>
+                          <a:latin typeface="Segoe UI"/>
+                        </a:rPr>
+                        <a:t>210</a:t>
+                      </a:r>
+                    </a:p>
+                  </a:txBody>
+                  <a:tcPr marL="82296" marR="82296" marT="27432" marB="27432" anchor="ctr">
+                    <a:solidFill>
+                      <a:srgbClr val="FFFFFF"/>
+                    </a:solidFill>
+                  </a:tcPr>
+                </a:tc>
+                <a:tc>
+                  <a:txBody>
+                    <a:bodyPr wrap="square"/>
+                    <a:lstStyle/>
+                    <a:p>
+                      <a:r>
                         <a:rPr sz="1232" b="0">
                           <a:solidFill>
                             <a:srgbClr val="1B2738"/>
                           </a:solidFill>
                           <a:latin typeface="Segoe UI"/>
                         </a:rPr>
-                        <a:t>2100–2400</a:t>
+                        <a:t>1,8 мс</a:t>
                       </a:r>
                     </a:p>
                   </a:txBody>
@@ -10700,7 +10817,16 @@
                           </a:solidFill>
                           <a:latin typeface="Consolas"/>
                         </a:rPr>
-                        <a:t>SimpleWorker</a:t>
+                        <a:t>Worker</a:t>
+                      </a:r>
+                      <a:r>
+                        <a:rPr sz="1232" b="0">
+                          <a:solidFill>
+                            <a:srgbClr val="1B2738"/>
+                          </a:solidFill>
+                          <a:latin typeface="Segoe UI"/>
+                        </a:rPr>
+                        <a:t> (fork)</a:t>
                       </a:r>
                     </a:p>
                   </a:txBody>
@@ -10722,7 +10848,7 @@
                           </a:solidFill>
                           <a:latin typeface="Segoe UI"/>
                         </a:rPr>
-                        <a:t>300 → 846</a:t>
+                        <a:t>13 → 45</a:t>
                       </a:r>
                     </a:p>
                   </a:txBody>
@@ -10744,7 +10870,7 @@
                           </a:solidFill>
                           <a:latin typeface="Segoe UI"/>
                         </a:rPr>
-                        <a:t>19 → 64</a:t>
+                        <a:t>7 → 24</a:t>
                       </a:r>
                     </a:p>
                   </a:txBody>
@@ -10766,7 +10892,29 @@
                           </a:solidFill>
                           <a:latin typeface="Segoe UI"/>
                         </a:rPr>
-                        <a:t>2100–2400</a:t>
+                        <a:t>2366</a:t>
+                      </a:r>
+                    </a:p>
+                  </a:txBody>
+                  <a:tcPr marL="82296" marR="82296" marT="27432" marB="27432" anchor="ctr">
+                    <a:solidFill>
+                      <a:srgbClr val="F2F5FA"/>
+                    </a:solidFill>
+                  </a:tcPr>
+                </a:tc>
+                <a:tc>
+                  <a:txBody>
+                    <a:bodyPr wrap="square"/>
+                    <a:lstStyle/>
+                    <a:p>
+                      <a:r>
+                        <a:rPr sz="1232" b="1">
+                          <a:solidFill>
+                            <a:srgbClr val="1B2738"/>
+                          </a:solidFill>
+                          <a:latin typeface="Segoe UI"/>
+                        </a:rPr>
+                        <a:t>72 мс</a:t>
                       </a:r>
                     </a:p>
                   </a:txBody>
@@ -10777,6 +10925,127 @@
                   </a:tcPr>
                 </a:tc>
               </a:tr>
+              <a:tr h="380268">
+                <a:tc>
+                  <a:txBody>
+                    <a:bodyPr wrap="square"/>
+                    <a:lstStyle/>
+                    <a:p>
+                      <a:r>
+                        <a:rPr sz="1232" b="0">
+                          <a:solidFill>
+                            <a:srgbClr val="1B2738"/>
+                          </a:solidFill>
+                          <a:latin typeface="Segoe UI"/>
+                        </a:rPr>
+                        <a:t>RQ </a:t>
+                      </a:r>
+                      <a:r>
+                        <a:rPr sz="1132" b="0">
+                          <a:solidFill>
+                            <a:srgbClr val="E8590C"/>
+                          </a:solidFill>
+                          <a:latin typeface="Consolas"/>
+                        </a:rPr>
+                        <a:t>SimpleWorker</a:t>
+                      </a:r>
+                    </a:p>
+                  </a:txBody>
+                  <a:tcPr marL="82296" marR="82296" marT="27432" marB="27432" anchor="ctr">
+                    <a:solidFill>
+                      <a:srgbClr val="FFFFFF"/>
+                    </a:solidFill>
+                  </a:tcPr>
+                </a:tc>
+                <a:tc>
+                  <a:txBody>
+                    <a:bodyPr wrap="square"/>
+                    <a:lstStyle/>
+                    <a:p>
+                      <a:r>
+                        <a:rPr sz="1232" b="0">
+                          <a:solidFill>
+                            <a:srgbClr val="1B2738"/>
+                          </a:solidFill>
+                          <a:latin typeface="Segoe UI"/>
+                        </a:rPr>
+                        <a:t>296 → 939</a:t>
+                      </a:r>
+                    </a:p>
+                  </a:txBody>
+                  <a:tcPr marL="82296" marR="82296" marT="27432" marB="27432" anchor="ctr">
+                    <a:solidFill>
+                      <a:srgbClr val="FFFFFF"/>
+                    </a:solidFill>
+                  </a:tcPr>
+                </a:tc>
+                <a:tc>
+                  <a:txBody>
+                    <a:bodyPr wrap="square"/>
+                    <a:lstStyle/>
+                    <a:p>
+                      <a:r>
+                        <a:rPr sz="1232" b="0">
+                          <a:solidFill>
+                            <a:srgbClr val="1B2738"/>
+                          </a:solidFill>
+                          <a:latin typeface="Segoe UI"/>
+                        </a:rPr>
+                        <a:t>19 → 65</a:t>
+                      </a:r>
+                    </a:p>
+                  </a:txBody>
+                  <a:tcPr marL="82296" marR="82296" marT="27432" marB="27432" anchor="ctr">
+                    <a:solidFill>
+                      <a:srgbClr val="FFFFFF"/>
+                    </a:solidFill>
+                  </a:tcPr>
+                </a:tc>
+                <a:tc>
+                  <a:txBody>
+                    <a:bodyPr wrap="square"/>
+                    <a:lstStyle/>
+                    <a:p>
+                      <a:r>
+                        <a:rPr sz="1232" b="0">
+                          <a:solidFill>
+                            <a:srgbClr val="1B2738"/>
+                          </a:solidFill>
+                          <a:latin typeface="Segoe UI"/>
+                        </a:rPr>
+                        <a:t>2567</a:t>
+                      </a:r>
+                    </a:p>
+                  </a:txBody>
+                  <a:tcPr marL="82296" marR="82296" marT="27432" marB="27432" anchor="ctr">
+                    <a:solidFill>
+                      <a:srgbClr val="FFFFFF"/>
+                    </a:solidFill>
+                  </a:tcPr>
+                </a:tc>
+                <a:tc>
+                  <a:txBody>
+                    <a:bodyPr wrap="square"/>
+                    <a:lstStyle/>
+                    <a:p>
+                      <a:r>
+                        <a:rPr sz="1232" b="0">
+                          <a:solidFill>
+                            <a:srgbClr val="1B2738"/>
+                          </a:solidFill>
+                          <a:latin typeface="Segoe UI"/>
+                        </a:rPr>
+                        <a:t>3,5 мс</a:t>
+                      </a:r>
+                    </a:p>
+                  </a:txBody>
+                  <a:tcPr marL="82296" marR="82296" marT="27432" marB="27432" anchor="ctr">
+                    <a:solidFill>
+                      <a:srgbClr val="FFFFFF"/>
+                    </a:solidFill>
+                  </a:tcPr>
+                </a:tc>
+              </a:tr>
             </a:tbl>
           </a:graphicData>
         </a:graphic>
@@ -10789,8 +11058,8 @@
         </p:nvSpPr>
         <p:spPr>
           <a:xfrm>
-            <a:off x="566928" y="4108093"/>
-            <a:ext cx="11057839" cy="2006193"/>
+            <a:off x="566928" y="4388204"/>
+            <a:ext cx="11057839" cy="1826239"/>
           </a:xfrm>
           <a:prstGeom prst="rect">
             <a:avLst/>
@@ -10814,22 +11083,40 @@
               <a:buChar char="■"/>
             </a:pPr>
             <a:r>
-              <a:rPr sz="1320" b="1">
-                <a:solidFill>
-                  <a:srgbClr val="1B2738"/>
-                </a:solidFill>
-                <a:latin typeface="Segoe UI"/>
-              </a:rPr>
-              <a:t>Накладные расходы очереди ≈ 3 мс</a:t>
-            </a:r>
-            <a:r>
-              <a:rPr sz="1320" b="0">
-                <a:solidFill>
-                  <a:srgbClr val="1B2738"/>
-                </a:solidFill>
-                <a:latin typeface="Segoe UI"/>
-              </a:rPr>
-              <a:t> на задачу end-to-end: Celery + Redis, 4 воркера, ненакопленная очередь — p50 = 3 мс, p99 = 4 мс.</a:t>
+              <a:rPr sz="1452" b="1">
+                <a:solidFill>
+                  <a:srgbClr val="1B2738"/>
+                </a:solidFill>
+                <a:latin typeface="Segoe UI"/>
+              </a:rPr>
+              <a:t>Накладные расходы очереди — 1,8 мс</a:t>
+            </a:r>
+            <a:r>
+              <a:rPr sz="1452" b="0">
+                <a:solidFill>
+                  <a:srgbClr val="1B2738"/>
+                </a:solidFill>
+                <a:latin typeface="Segoe UI"/>
+              </a:rPr>
+              <a:t> на задачу у Celery (одинаково на обоих брокерах), 3,5 мс у RQ </a:t>
+            </a:r>
+            <a:r>
+              <a:rPr sz="1352" b="0">
+                <a:solidFill>
+                  <a:srgbClr val="E8590C"/>
+                </a:solidFill>
+                <a:latin typeface="Consolas"/>
+              </a:rPr>
+              <a:t>SimpleWorker</a:t>
+            </a:r>
+            <a:r>
+              <a:rPr sz="1452" b="0">
+                <a:solidFill>
+                  <a:srgbClr val="1B2738"/>
+                </a:solidFill>
+                <a:latin typeface="Segoe UI"/>
+              </a:rPr>
+              <a:t>, 72 мс у RQ с fork.</a:t>
             </a:r>
           </a:p>
           <a:p>
@@ -10844,22 +11131,58 @@
               <a:buChar char="■"/>
             </a:pPr>
             <a:r>
-              <a:rPr sz="1320" b="1">
-                <a:solidFill>
-                  <a:srgbClr val="1B2738"/>
-                </a:solidFill>
-                <a:latin typeface="Segoe UI"/>
-              </a:rPr>
-              <a:t>RabbitMQ под Celery быстрее Redis в 1,5–1,8 раза</a:t>
-            </a:r>
-            <a:r>
-              <a:rPr sz="1320" b="0">
-                <a:solidFill>
-                  <a:srgbClr val="1B2738"/>
-                </a:solidFill>
-                <a:latin typeface="Segoe UI"/>
-              </a:rPr>
-              <a:t> на коротких задачах и на постановке. Результат контринтуитивный — на следующем слайде разбор, почему так вышло.</a:t>
+              <a:rPr sz="1452" b="1">
+                <a:solidFill>
+                  <a:srgbClr val="1B2738"/>
+                </a:solidFill>
+                <a:latin typeface="Segoe UI"/>
+              </a:rPr>
+              <a:t>От ≈50 мс полезной работы все конфигурации без fork неразличимы</a:t>
+            </a:r>
+            <a:r>
+              <a:rPr sz="1452" b="0">
+                <a:solidFill>
+                  <a:srgbClr val="1B2738"/>
+                </a:solidFill>
+                <a:latin typeface="Segoe UI"/>
+              </a:rPr>
+              <a:t> — на </a:t>
+            </a:r>
+            <a:r>
+              <a:rPr sz="1352" b="0">
+                <a:solidFill>
+                  <a:srgbClr val="E8590C"/>
+                </a:solidFill>
+                <a:latin typeface="Consolas"/>
+              </a:rPr>
+              <a:t>cpu_small</a:t>
+            </a:r>
+            <a:r>
+              <a:rPr sz="1452" b="0">
+                <a:solidFill>
+                  <a:srgbClr val="1B2738"/>
+                </a:solidFill>
+                <a:latin typeface="Segoe UI"/>
+              </a:rPr>
+              <a:t> и </a:t>
+            </a:r>
+            <a:r>
+              <a:rPr sz="1352" b="0">
+                <a:solidFill>
+                  <a:srgbClr val="E8590C"/>
+                </a:solidFill>
+                <a:latin typeface="Consolas"/>
+              </a:rPr>
+              <a:t>io_sleep</a:t>
+            </a:r>
+            <a:r>
+              <a:rPr sz="1452" b="0">
+                <a:solidFill>
+                  <a:srgbClr val="1B2738"/>
+                </a:solidFill>
+                <a:latin typeface="Segoe UI"/>
+              </a:rPr>
+              <a:t> разница в пределах 2 %.</a:t>
             </a:r>
           </a:p>
           <a:p>
@@ -10874,40 +11197,22 @@
               <a:buChar char="■"/>
             </a:pPr>
             <a:r>
-              <a:rPr sz="1320" b="1">
-                <a:solidFill>
-                  <a:srgbClr val="1B2738"/>
-                </a:solidFill>
-                <a:latin typeface="Segoe UI"/>
-              </a:rPr>
-              <a:t>Fork в RQ стоит порядок величины</a:t>
-            </a:r>
-            <a:r>
-              <a:rPr sz="1320" b="0">
-                <a:solidFill>
-                  <a:srgbClr val="1B2738"/>
-                </a:solidFill>
-                <a:latin typeface="Segoe UI"/>
-              </a:rPr>
-              <a:t> на микрозадачах и ×2,5 на 60-мс задачах. </a:t>
-            </a:r>
-            <a:r>
-              <a:rPr sz="1220" b="0">
-                <a:solidFill>
-                  <a:srgbClr val="E8590C"/>
-                </a:solidFill>
-                <a:latin typeface="Consolas"/>
-              </a:rPr>
-              <a:t>SimpleWorker</a:t>
-            </a:r>
-            <a:r>
-              <a:rPr sz="1320" b="0">
-                <a:solidFill>
-                  <a:srgbClr val="1B2738"/>
-                </a:solidFill>
-                <a:latin typeface="Segoe UI"/>
-              </a:rPr>
-              <a:t> уравнивает RQ с Celery.</a:t>
+              <a:rPr sz="1452" b="1">
+                <a:solidFill>
+                  <a:srgbClr val="1B2738"/>
+                </a:solidFill>
+                <a:latin typeface="Segoe UI"/>
+              </a:rPr>
+              <a:t>Масштабирование ×3,0–4,1</a:t>
+            </a:r>
+            <a:r>
+              <a:rPr sz="1452" b="0">
+                <a:solidFill>
+                  <a:srgbClr val="1B2738"/>
+                </a:solidFill>
+                <a:latin typeface="Segoe UI"/>
+              </a:rPr>
+              <a:t> на четырёх воркерах: очередь — рабочий способ горизонтального масштабирования.</a:t>
             </a:r>
           </a:p>
           <a:p>
@@ -10922,70 +11227,22 @@
               <a:buChar char="■"/>
             </a:pPr>
             <a:r>
-              <a:rPr sz="1320" b="0">
-                <a:solidFill>
-                  <a:srgbClr val="1B2738"/>
-                </a:solidFill>
-                <a:latin typeface="Segoe UI"/>
-              </a:rPr>
-              <a:t>Масштабирование ×3,4–4,1 на 4 воркерах; </a:t>
-            </a:r>
-            <a:r>
-              <a:rPr sz="1220" b="0">
-                <a:solidFill>
-                  <a:srgbClr val="E8590C"/>
-                </a:solidFill>
-                <a:latin typeface="Consolas"/>
-              </a:rPr>
-              <a:t>noop</a:t>
-            </a:r>
-            <a:r>
-              <a:rPr sz="1320" b="0">
-                <a:solidFill>
-                  <a:srgbClr val="1B2738"/>
-                </a:solidFill>
-                <a:latin typeface="Segoe UI"/>
-              </a:rPr>
-              <a:t> у Celery + Redis упёрся не в воркеров, а в </a:t>
-            </a:r>
-            <a:r>
-              <a:rPr sz="1320" b="1">
-                <a:solidFill>
-                  <a:srgbClr val="1B2738"/>
-                </a:solidFill>
-                <a:latin typeface="Segoe UI"/>
-              </a:rPr>
-              <a:t>продьюсера</a:t>
-            </a:r>
-            <a:r>
-              <a:rPr sz="1320" b="0">
-                <a:solidFill>
-                  <a:srgbClr val="1B2738"/>
-                </a:solidFill>
-                <a:latin typeface="Segoe UI"/>
-              </a:rPr>
-              <a:t> (740 msg/s) — на микрозадачах узкое место в постановке.</a:t>
-            </a:r>
-          </a:p>
-          <a:p>
-            <a:pPr marL="237744" indent="-219456">
-              <a:spcAft>
-                <a:spcPts val="616"/>
-              </a:spcAft>
-              <a:buClr>
-                <a:srgbClr val="2F6FED"/>
-              </a:buClr>
-              <a:buFont typeface="Arial"/>
-              <a:buChar char="■"/>
-            </a:pPr>
-            <a:r>
-              <a:rPr sz="1320" b="0">
-                <a:solidFill>
-                  <a:srgbClr val="1B2738"/>
-                </a:solidFill>
-                <a:latin typeface="Segoe UI"/>
-              </a:rPr>
-              <a:t>Оговорки: один хост, Docker Desktop/WSL2 (fork дороже), включённые события для Flower у Celery, «наивная» постановка без батчинга.</a:t>
+              <a:rPr sz="1452" b="1">
+                <a:solidFill>
+                  <a:srgbClr val="1B2738"/>
+                </a:solidFill>
+                <a:latin typeface="Segoe UI"/>
+              </a:rPr>
+              <a:t>Преимущество RabbitMQ на постановке исчезает при включении publisher confirms</a:t>
+            </a:r>
+            <a:r>
+              <a:rPr sz="1452" b="0">
+                <a:solidFill>
+                  <a:srgbClr val="1B2738"/>
+                </a:solidFill>
+                <a:latin typeface="Segoe UI"/>
+              </a:rPr>
+              <a:t>: 2333 → 210 msg/s, в 7,5 раза медленнее Redis. На разбор очереди confirms не влияют вовсе.</a:t>
             </a:r>
           </a:p>
         </p:txBody>
@@ -11115,7 +11372,7 @@
                 </a:solidFill>
                 <a:latin typeface="Segoe UI"/>
               </a:rPr>
-              <a:t>Проверка результата: почему Redis «проиграл»</a:t>
+              <a:t>Свой результат нужно проверять</a:t>
             </a:r>
           </a:p>
         </p:txBody>
@@ -11193,7 +11450,7 @@
                 </a:solidFill>
                 <a:latin typeface="Segoe UI"/>
               </a:rPr>
-              <a:t>Интуиция говорила обратное — разобрал замер по частям</a:t>
+              <a:t>Первая версия эксперимента дала «RabbitMQ быстрее Redis в 1,5–1,8 раза»</a:t>
             </a:r>
           </a:p>
         </p:txBody>
@@ -11207,8 +11464,8 @@
           <p:nvPr/>
         </p:nvGraphicFramePr>
         <p:xfrm>
-          <a:off x="566928" y="1893907"/>
-          <a:ext cx="11057838" cy="1943646"/>
+          <a:off x="566928" y="1939444"/>
+          <a:ext cx="11057838" cy="1995217"/>
         </p:xfrm>
         <a:graphic>
           <a:graphicData uri="http://schemas.openxmlformats.org/drawingml/2006/table">
@@ -11217,23 +11474,23 @@
                 <a:tableStyleId>{5C22544A-7EE6-4342-B048-85BDC9FD1C3A}</a:tableStyleId>
               </a:tblPr>
               <a:tblGrid>
-                <a:gridCol w="5528919"/>
-                <a:gridCol w="5528919"/>
+                <a:gridCol w="7193540"/>
+                <a:gridCol w="3864298"/>
               </a:tblGrid>
-              <a:tr h="323941">
+              <a:tr h="361492">
                 <a:tc>
                   <a:txBody>
                     <a:bodyPr wrap="square"/>
                     <a:lstStyle/>
                     <a:p>
                       <a:r>
-                        <a:rPr sz="896" b="1">
+                        <a:rPr sz="1120" b="1">
                           <a:solidFill>
                             <a:srgbClr val="FFFFFF"/>
                           </a:solidFill>
                           <a:latin typeface="Segoe UI"/>
                         </a:rPr>
-                        <a:t>Замер из контейнера воркера</a:t>
+                        <a:t>Что было не так</a:t>
                       </a:r>
                     </a:p>
                   </a:txBody>
@@ -11249,13 +11506,13 @@
                     <a:lstStyle/>
                     <a:p>
                       <a:r>
-                        <a:rPr sz="896" b="1">
+                        <a:rPr sz="1120" b="1">
                           <a:solidFill>
                             <a:srgbClr val="FFFFFF"/>
                           </a:solidFill>
                           <a:latin typeface="Segoe UI"/>
                         </a:rPr>
-                        <a:t>Результат</a:t>
+                        <a:t>Как исправлено</a:t>
                       </a:r>
                     </a:p>
                   </a:txBody>
@@ -11266,56 +11523,38 @@
                   </a:tcPr>
                 </a:tc>
               </a:tr>
-              <a:tr h="323941">
+              <a:tr h="549249">
                 <a:tc>
                   <a:txBody>
                     <a:bodyPr wrap="square"/>
                     <a:lstStyle/>
                     <a:p>
                       <a:r>
-                        <a:rPr sz="896" b="0">
+                        <a:rPr sz="1120" b="0">
                           <a:solidFill>
                             <a:srgbClr val="1B2738"/>
                           </a:solidFill>
                           <a:latin typeface="Segoe UI"/>
                         </a:rPr>
-                        <a:t>Redis: </a:t>
-                      </a:r>
-                      <a:r>
-                        <a:rPr sz="796" b="0">
-                          <a:solidFill>
-                            <a:srgbClr val="E8590C"/>
-                          </a:solidFill>
-                          <a:latin typeface="Consolas"/>
-                        </a:rPr>
-                        <a:t>PING</a:t>
-                      </a:r>
-                      <a:r>
-                        <a:rPr sz="896" b="0">
+                        <a:t>Один Redis обслуживал брокер, события Flower и результаты — </a:t>
+                      </a:r>
+                      <a:r>
+                        <a:rPr sz="1120" b="1">
                           <a:solidFill>
                             <a:srgbClr val="1B2738"/>
                           </a:solidFill>
                           <a:latin typeface="Segoe UI"/>
                         </a:rPr>
-                        <a:t> / </a:t>
-                      </a:r>
-                      <a:r>
-                        <a:rPr sz="796" b="0">
-                          <a:solidFill>
-                            <a:srgbClr val="E8590C"/>
-                          </a:solidFill>
-                          <a:latin typeface="Consolas"/>
-                        </a:rPr>
-                        <a:t>LPUSH</a:t>
-                      </a:r>
-                      <a:r>
-                        <a:rPr sz="896" b="0">
+                        <a:t>26 команд на задачу</a:t>
+                      </a:r>
+                      <a:r>
+                        <a:rPr sz="1120" b="0">
                           <a:solidFill>
                             <a:srgbClr val="1B2738"/>
                           </a:solidFill>
                           <a:latin typeface="Segoe UI"/>
                         </a:rPr>
-                        <a:t> по одной</a:t>
+                        <a:t> против 13 у конфигурации с RabbitMQ</a:t>
                       </a:r>
                     </a:p>
                   </a:txBody>
@@ -11331,13 +11570,13 @@
                     <a:lstStyle/>
                     <a:p>
                       <a:r>
-                        <a:rPr sz="896" b="0">
+                        <a:rPr sz="1120" b="0">
                           <a:solidFill>
                             <a:srgbClr val="1B2738"/>
                           </a:solidFill>
                           <a:latin typeface="Segoe UI"/>
                         </a:rPr>
-                        <a:t>10 300 / 9 100 оп/с (≈110 мкс round-trip)</a:t>
+                        <a:t>отдельный Redis под результаты и метрики, события выключены</a:t>
                       </a:r>
                     </a:p>
                   </a:txBody>
@@ -11348,38 +11587,20 @@
                   </a:tcPr>
                 </a:tc>
               </a:tr>
-              <a:tr h="323941">
+              <a:tr h="361492">
                 <a:tc>
                   <a:txBody>
                     <a:bodyPr wrap="square"/>
                     <a:lstStyle/>
                     <a:p>
                       <a:r>
-                        <a:rPr sz="896" b="0">
+                        <a:rPr sz="1120" b="0">
                           <a:solidFill>
                             <a:srgbClr val="1B2738"/>
                           </a:solidFill>
                           <a:latin typeface="Segoe UI"/>
                         </a:rPr>
-                        <a:t>Redis: </a:t>
-                      </a:r>
-                      <a:r>
-                        <a:rPr sz="796" b="0">
-                          <a:solidFill>
-                            <a:srgbClr val="E8590C"/>
-                          </a:solidFill>
-                          <a:latin typeface="Consolas"/>
-                        </a:rPr>
-                        <a:t>LPUSH</a:t>
-                      </a:r>
-                      <a:r>
-                        <a:rPr sz="896" b="0">
-                          <a:solidFill>
-                            <a:srgbClr val="1B2738"/>
-                          </a:solidFill>
-                          <a:latin typeface="Segoe UI"/>
-                        </a:rPr>
-                        <a:t> пачками по 100 (pipeline)</a:t>
+                        <a:t>«Пропускная способность» на микрозадачах измеряла продьюсера: очередь пустовала</a:t>
                       </a:r>
                     </a:p>
                   </a:txBody>
@@ -11395,13 +11616,13 @@
                     <a:lstStyle/>
                     <a:p>
                       <a:r>
-                        <a:rPr sz="896" b="0">
+                        <a:rPr sz="1120" b="0">
                           <a:solidFill>
                             <a:srgbClr val="1B2738"/>
                           </a:solidFill>
                           <a:latin typeface="Segoe UI"/>
                         </a:rPr>
-                        <a:t>106 700 оп/с</a:t>
+                        <a:t>очередь наполняется при остановленном потреблении</a:t>
                       </a:r>
                     </a:p>
                   </a:txBody>
@@ -11412,20 +11633,20 @@
                   </a:tcPr>
                 </a:tc>
               </a:tr>
-              <a:tr h="323941">
+              <a:tr h="361492">
                 <a:tc>
                   <a:txBody>
                     <a:bodyPr wrap="square"/>
                     <a:lstStyle/>
                     <a:p>
                       <a:r>
-                        <a:rPr sz="896" b="0">
+                        <a:rPr sz="1120" b="0">
                           <a:solidFill>
                             <a:srgbClr val="1B2738"/>
                           </a:solidFill>
                           <a:latin typeface="Segoe UI"/>
                         </a:rPr>
-                        <a:t>Celery: публикация задачи → Redis</a:t>
+                        <a:t>«Задержка» была временем ожидания в очереди — закон Литтла, а не цена задачи</a:t>
                       </a:r>
                     </a:p>
                   </a:txBody>
@@ -11441,13 +11662,13 @@
                     <a:lstStyle/>
                     <a:p>
                       <a:r>
-                        <a:rPr sz="896" b="0">
+                        <a:rPr sz="1120" b="0">
                           <a:solidFill>
                             <a:srgbClr val="1B2738"/>
                           </a:solidFill>
                           <a:latin typeface="Segoe UI"/>
                         </a:rPr>
-                        <a:t>1 169 оп/с (855 мкс)</a:t>
+                        <a:t>отдельная фаза: 30 задач по одной на пустой очереди</a:t>
                       </a:r>
                     </a:p>
                   </a:txBody>
@@ -11458,20 +11679,20 @@
                   </a:tcPr>
                 </a:tc>
               </a:tr>
-              <a:tr h="323941">
+              <a:tr h="361492">
                 <a:tc>
                   <a:txBody>
                     <a:bodyPr wrap="square"/>
                     <a:lstStyle/>
                     <a:p>
                       <a:r>
-                        <a:rPr sz="896" b="0">
+                        <a:rPr sz="1120" b="0">
                           <a:solidFill>
                             <a:srgbClr val="1B2738"/>
                           </a:solidFill>
                           <a:latin typeface="Segoe UI"/>
                         </a:rPr>
-                        <a:t>Celery: публикация задачи → RabbitMQ</a:t>
+                        <a:t>Сравнивались конфигурации с разными гарантиями публикации</a:t>
                       </a:r>
                     </a:p>
                   </a:txBody>
@@ -11487,13 +11708,13 @@
                     <a:lstStyle/>
                     <a:p>
                       <a:r>
-                        <a:rPr sz="896" b="0">
+                        <a:rPr sz="1120" b="0">
                           <a:solidFill>
                             <a:srgbClr val="1B2738"/>
                           </a:solidFill>
                           <a:latin typeface="Segoe UI"/>
                         </a:rPr>
-                        <a:t>1 901 оп/с (526 мкс)</a:t>
+                        <a:t>добавлена конфигурация с publisher confirms</a:t>
                       </a:r>
                     </a:p>
                   </a:txBody>
@@ -11504,70 +11725,6 @@
                   </a:tcPr>
                 </a:tc>
               </a:tr>
-              <a:tr h="323941">
-                <a:tc>
-                  <a:txBody>
-                    <a:bodyPr wrap="square"/>
-                    <a:lstStyle/>
-                    <a:p>
-                      <a:r>
-                        <a:rPr sz="896" b="0">
-                          <a:solidFill>
-                            <a:srgbClr val="1B2738"/>
-                          </a:solidFill>
-                          <a:latin typeface="Segoe UI"/>
-                        </a:rPr>
-                        <a:t>Celery: → RabbitMQ + </a:t>
-                      </a:r>
-                      <a:r>
-                        <a:rPr sz="796" b="0">
-                          <a:solidFill>
-                            <a:srgbClr val="E8590C"/>
-                          </a:solidFill>
-                          <a:latin typeface="Consolas"/>
-                        </a:rPr>
-                        <a:t>confirm_publish=True</a:t>
-                      </a:r>
-                    </a:p>
-                  </a:txBody>
-                  <a:tcPr marL="82296" marR="82296" marT="27432" marB="27432" anchor="ctr">
-                    <a:solidFill>
-                      <a:srgbClr val="FFFFFF"/>
-                    </a:solidFill>
-                  </a:tcPr>
-                </a:tc>
-                <a:tc>
-                  <a:txBody>
-                    <a:bodyPr wrap="square"/>
-                    <a:lstStyle/>
-                    <a:p>
-                      <a:r>
-                        <a:rPr sz="896" b="1">
-                          <a:solidFill>
-                            <a:srgbClr val="1B2738"/>
-                          </a:solidFill>
-                          <a:latin typeface="Segoe UI"/>
-                        </a:rPr>
-                        <a:t>218 оп/с</a:t>
-                      </a:r>
-                      <a:r>
-                        <a:rPr sz="896" b="0">
-                          <a:solidFill>
-                            <a:srgbClr val="1B2738"/>
-                          </a:solidFill>
-                          <a:latin typeface="Segoe UI"/>
-                        </a:rPr>
-                        <a:t> (4 584 мкс)</a:t>
-                      </a:r>
-                    </a:p>
-                  </a:txBody>
-                  <a:tcPr marL="82296" marR="82296" marT="27432" marB="27432" anchor="ctr">
-                    <a:solidFill>
-                      <a:srgbClr val="FFFFFF"/>
-                    </a:solidFill>
-                  </a:tcPr>
-                </a:tc>
-              </a:tr>
             </a:tbl>
           </a:graphicData>
         </a:graphic>
@@ -11580,8 +11737,8 @@
         </p:nvSpPr>
         <p:spPr>
           <a:xfrm>
-            <a:off x="566928" y="4111873"/>
-            <a:ext cx="11057839" cy="1250899"/>
+            <a:off x="566928" y="4208981"/>
+            <a:ext cx="11057839" cy="1239926"/>
           </a:xfrm>
           <a:prstGeom prst="rect">
             <a:avLst/>
@@ -11596,7 +11753,7 @@
           <a:p>
             <a:pPr marL="237744" indent="-219456">
               <a:spcAft>
-                <a:spcPts val="448"/>
+                <a:spcPts val="560"/>
               </a:spcAft>
               <a:buClr>
                 <a:srgbClr val="2F6FED"/>
@@ -11605,28 +11762,46 @@
               <a:buChar char="■"/>
             </a:pPr>
             <a:r>
-              <a:rPr sz="1056" b="1">
-                <a:solidFill>
-                  <a:srgbClr val="1B2738"/>
-                </a:solidFill>
-                <a:latin typeface="Segoe UI"/>
-              </a:rPr>
-              <a:t>Redis работал на ~10 % своего потолка</a:t>
-            </a:r>
-            <a:r>
-              <a:rPr sz="1056" b="0">
-                <a:solidFill>
-                  <a:srgbClr val="1B2738"/>
-                </a:solidFill>
-                <a:latin typeface="Segoe UI"/>
-              </a:rPr>
-              <a:t>: упирались не в него, а в число синхронных round-trip'ов — транспорт kombu эмулирует ack четырьмя командами на задачу.</a:t>
+              <a:rPr sz="1440" b="1">
+                <a:solidFill>
+                  <a:srgbClr val="1B2738"/>
+                </a:solidFill>
+                <a:latin typeface="Segoe UI"/>
+              </a:rPr>
+              <a:t>Redis работал на ~10 % потолка</a:t>
+            </a:r>
+            <a:r>
+              <a:rPr sz="1440" b="0">
+                <a:solidFill>
+                  <a:srgbClr val="1B2738"/>
+                </a:solidFill>
+                <a:latin typeface="Segoe UI"/>
+              </a:rPr>
+              <a:t>: 9 000 </a:t>
+            </a:r>
+            <a:r>
+              <a:rPr sz="1340" b="0">
+                <a:solidFill>
+                  <a:srgbClr val="E8590C"/>
+                </a:solidFill>
+                <a:latin typeface="Consolas"/>
+              </a:rPr>
+              <a:t>LPUSH</a:t>
+            </a:r>
+            <a:r>
+              <a:rPr sz="1440" b="0">
+                <a:solidFill>
+                  <a:srgbClr val="1B2738"/>
+                </a:solidFill>
+                <a:latin typeface="Segoe UI"/>
+              </a:rPr>
+              <a:t>/с из контейнера при нагрузке 300–1500 задач/с. Упирались в число round-trip'ов (≈110 мкс каждый), а не в сервер.</a:t>
             </a:r>
           </a:p>
           <a:p>
             <a:pPr marL="237744" indent="-219456">
               <a:spcAft>
-                <a:spcPts val="448"/>
+                <a:spcPts val="560"/>
               </a:spcAft>
               <a:buClr>
                 <a:srgbClr val="2F6FED"/>
@@ -11635,28 +11810,82 @@
               <a:buChar char="■"/>
             </a:pPr>
             <a:r>
-              <a:rPr sz="1056" b="1">
-                <a:solidFill>
-                  <a:srgbClr val="1B2738"/>
-                </a:solidFill>
-                <a:latin typeface="Segoe UI"/>
-              </a:rPr>
-              <a:t>Главная цена — сам Celery</a:t>
-            </a:r>
-            <a:r>
-              <a:rPr sz="1056" b="0">
-                <a:solidFill>
-                  <a:srgbClr val="1B2738"/>
-                </a:solidFill>
-                <a:latin typeface="Segoe UI"/>
-              </a:rPr>
-              <a:t> (380–570 мкс на сборку сообщения), а не брокер: RQ на том же Redis ставит 2 300 задач/с.</a:t>
+              <a:rPr sz="1440" b="1">
+                <a:solidFill>
+                  <a:srgbClr val="1B2738"/>
+                </a:solidFill>
+                <a:latin typeface="Segoe UI"/>
+              </a:rPr>
+              <a:t>После перепрогона</a:t>
+            </a:r>
+            <a:r>
+              <a:rPr sz="1440" b="0">
+                <a:solidFill>
+                  <a:srgbClr val="1B2738"/>
+                </a:solidFill>
+                <a:latin typeface="Segoe UI"/>
+              </a:rPr>
+              <a:t>: разрыв 1,57× → </a:t>
+            </a:r>
+            <a:r>
+              <a:rPr sz="1440" b="1">
+                <a:solidFill>
+                  <a:srgbClr val="1B2738"/>
+                </a:solidFill>
+                <a:latin typeface="Segoe UI"/>
+              </a:rPr>
+              <a:t>1,29×</a:t>
+            </a:r>
+            <a:r>
+              <a:rPr sz="1440" b="0">
+                <a:solidFill>
+                  <a:srgbClr val="1B2738"/>
+                </a:solidFill>
+                <a:latin typeface="Segoe UI"/>
+              </a:rPr>
+              <a:t>, масштабирование ×2,4 → </a:t>
+            </a:r>
+            <a:r>
+              <a:rPr sz="1440" b="1">
+                <a:solidFill>
+                  <a:srgbClr val="1B2738"/>
+                </a:solidFill>
+                <a:latin typeface="Segoe UI"/>
+              </a:rPr>
+              <a:t>×3,45</a:t>
+            </a:r>
+            <a:r>
+              <a:rPr sz="1440" b="0">
+                <a:solidFill>
+                  <a:srgbClr val="1B2738"/>
+                </a:solidFill>
+                <a:latin typeface="Segoe UI"/>
+              </a:rPr>
+              <a:t>, накладные расходы «≈3 мс» → </a:t>
+            </a:r>
+            <a:r>
+              <a:rPr sz="1440" b="1">
+                <a:solidFill>
+                  <a:srgbClr val="1B2738"/>
+                </a:solidFill>
+                <a:latin typeface="Segoe UI"/>
+              </a:rPr>
+              <a:t>1,8 мс</a:t>
+            </a:r>
+            <a:r>
+              <a:rPr sz="1440" b="0">
+                <a:solidFill>
+                  <a:srgbClr val="1B2738"/>
+                </a:solidFill>
+                <a:latin typeface="Segoe UI"/>
+              </a:rPr>
+              <a:t>.</a:t>
             </a:r>
           </a:p>
           <a:p>
             <a:pPr marL="237744" indent="-219456">
               <a:spcAft>
-                <a:spcPts val="448"/>
+                <a:spcPts val="560"/>
               </a:spcAft>
               <a:buClr>
                 <a:srgbClr val="2F6FED"/>
@@ -11665,70 +11894,40 @@
               <a:buChar char="■"/>
             </a:pPr>
             <a:r>
-              <a:rPr sz="1056" b="1">
-                <a:solidFill>
-                  <a:srgbClr val="1B2738"/>
-                </a:solidFill>
-                <a:latin typeface="Segoe UI"/>
-              </a:rPr>
-              <a:t>Асимметрия замера</a:t>
-            </a:r>
-            <a:r>
-              <a:rPr sz="1056" b="0">
-                <a:solidFill>
-                  <a:srgbClr val="1B2738"/>
-                </a:solidFill>
-                <a:latin typeface="Segoe UI"/>
-              </a:rPr>
-              <a:t>: в </a:t>
-            </a:r>
-            <a:r>
-              <a:rPr sz="956" b="0">
+              <a:rPr sz="1440" b="1">
+                <a:solidFill>
+                  <a:srgbClr val="1B2738"/>
+                </a:solidFill>
+                <a:latin typeface="Segoe UI"/>
+              </a:rPr>
+              <a:t>Устояло</a:t>
+            </a:r>
+            <a:r>
+              <a:rPr sz="1440" b="0">
+                <a:solidFill>
+                  <a:srgbClr val="1B2738"/>
+                </a:solidFill>
+                <a:latin typeface="Segoe UI"/>
+              </a:rPr>
+              <a:t>: цена fork в RQ, «от 50 мс брокер не важен», линейность масштабирования, идемпотентность при </a:t>
+            </a:r>
+            <a:r>
+              <a:rPr sz="1340" b="0">
                 <a:solidFill>
                   <a:srgbClr val="E8590C"/>
                 </a:solidFill>
                 <a:latin typeface="Consolas"/>
               </a:rPr>
-              <a:t>celery-redis</a:t>
-            </a:r>
-            <a:r>
-              <a:rPr sz="1056" b="0">
-                <a:solidFill>
-                  <a:srgbClr val="1B2738"/>
-                </a:solidFill>
-                <a:latin typeface="Segoe UI"/>
-              </a:rPr>
-              <a:t> один однопоточный Redis обслуживал брокер + события Flower + result backend — 26 команд на задачу против 13 у конфигурации с RabbitMQ.</a:t>
-            </a:r>
-          </a:p>
-          <a:p>
-            <a:pPr marL="237744" indent="-219456">
-              <a:spcAft>
-                <a:spcPts val="448"/>
-              </a:spcAft>
-              <a:buClr>
-                <a:srgbClr val="2F6FED"/>
-              </a:buClr>
-              <a:buFont typeface="Arial"/>
-              <a:buChar char="■"/>
-            </a:pPr>
-            <a:r>
-              <a:rPr sz="1056" b="1">
-                <a:solidFill>
-                  <a:srgbClr val="1B2738"/>
-                </a:solidFill>
-                <a:latin typeface="Segoe UI"/>
-              </a:rPr>
-              <a:t>Преимущество AMQP куплено гарантией</a:t>
-            </a:r>
-            <a:r>
-              <a:rPr sz="1056" b="0">
-                <a:solidFill>
-                  <a:srgbClr val="1B2738"/>
-                </a:solidFill>
-                <a:latin typeface="Segoe UI"/>
-              </a:rPr>
-              <a:t>: publish по умолчанию не подтверждается; включаем confirms — RabbitMQ в 8 раз медленнее Redis.</a:t>
+              <a:t>acks_late</a:t>
+            </a:r>
+            <a:r>
+              <a:rPr sz="1440" b="0">
+                <a:solidFill>
+                  <a:srgbClr val="1B2738"/>
+                </a:solidFill>
+                <a:latin typeface="Segoe UI"/>
+              </a:rPr>
+              <a:t>.</a:t>
             </a:r>
           </a:p>
         </p:txBody>
@@ -11741,8 +11940,8 @@
         </p:nvSpPr>
         <p:spPr>
           <a:xfrm>
-            <a:off x="566928" y="5472500"/>
-            <a:ext cx="11057839" cy="625449"/>
+            <a:off x="566928" y="5558635"/>
+            <a:ext cx="11057839" cy="493776"/>
           </a:xfrm>
           <a:prstGeom prst="rect">
             <a:avLst/>
@@ -11787,8 +11986,8 @@
         </p:nvSpPr>
         <p:spPr>
           <a:xfrm>
-            <a:off x="566928" y="5472500"/>
-            <a:ext cx="63500" cy="625449"/>
+            <a:off x="566928" y="5558635"/>
+            <a:ext cx="63500" cy="493776"/>
           </a:xfrm>
           <a:prstGeom prst="rect">
             <a:avLst/>
@@ -11831,8 +12030,8 @@
         </p:nvSpPr>
         <p:spPr>
           <a:xfrm>
-            <a:off x="804672" y="5600516"/>
-            <a:ext cx="10600639" cy="625449"/>
+            <a:off x="804672" y="5686651"/>
+            <a:ext cx="10600639" cy="493776"/>
           </a:xfrm>
           <a:prstGeom prst="rect">
             <a:avLst/>
@@ -11846,31 +12045,13 @@
           <a:lstStyle/>
           <a:p>
             <a:r>
-              <a:rPr sz="1024" b="0">
-                <a:solidFill>
-                  <a:srgbClr val="1B2738"/>
-                </a:solidFill>
-                <a:latin typeface="Segoe UI"/>
-              </a:rPr>
-              <a:t>Правильная формулировка: медленнее не Redis, а Redis-</a:t>
-            </a:r>
-            <a:r>
-              <a:rPr sz="1024" b="1">
-                <a:solidFill>
-                  <a:srgbClr val="1B2738"/>
-                </a:solidFill>
-                <a:latin typeface="Segoe UI"/>
-              </a:rPr>
-              <a:t>транспорт</a:t>
-            </a:r>
-            <a:r>
-              <a:rPr sz="1024" b="0">
-                <a:solidFill>
-                  <a:srgbClr val="1B2738"/>
-                </a:solidFill>
-                <a:latin typeface="Segoe UI"/>
-              </a:rPr>
-              <a:t> kombu в этой конфигурации. Вывод для выбора не меняется — RabbitMQ берут за гарантии, а не за скорость.</a:t>
+              <a:rPr sz="1280" b="0">
+                <a:solidFill>
+                  <a:srgbClr val="1B2738"/>
+                </a:solidFill>
+                <a:latin typeface="Segoe UI"/>
+              </a:rPr>
+              <a:t>Данные первой матрицы были воспроизводимы — неверной была интерпретация. Измерять надо именно то, что собираешься сравнивать.</a:t>
             </a:r>
           </a:p>
         </p:txBody>

--- a/slides/talk.pptx
+++ b/slides/talk.pptx
@@ -5103,31 +5103,6 @@
                 </a:solidFill>
                 <a:latin typeface="Segoe UI"/>
               </a:rPr>
-              <a:t>Репозиторий:  </a:t>
-            </a:r>
-            <a:r>
-              <a:rPr sz="1700" b="0">
-                <a:solidFill>
-                  <a:srgbClr val="1B2738"/>
-                </a:solidFill>
-                <a:latin typeface="Consolas"/>
-              </a:rPr>
-              <a:t>github.com/kirillkychkin/report-queue</a:t>
-            </a:r>
-          </a:p>
-          <a:p>
-            <a:pPr>
-              <a:spcAft>
-                <a:spcPts val="1200"/>
-              </a:spcAft>
-            </a:pPr>
-            <a:r>
-              <a:rPr sz="1500">
-                <a:solidFill>
-                  <a:srgbClr val="5B6B7C"/>
-                </a:solidFill>
-                <a:latin typeface="Segoe UI"/>
-              </a:rPr>
               <a:t>Дата:  </a:t>
             </a:r>
             <a:r>
@@ -13758,7 +13733,7 @@
                 </a:solidFill>
                 <a:latin typeface="Segoe UI"/>
               </a:rPr>
-              <a:t>Репозиторий проекта: </a:t>
+              <a:t>Запуск демо одной командой: </a:t>
             </a:r>
             <a:r>
               <a:rPr sz="1900" b="0">
@@ -13767,7 +13742,25 @@
                 </a:solidFill>
                 <a:latin typeface="Consolas"/>
               </a:rPr>
-              <a:t>github.com/kirillkychkin/report-queue</a:t>
+              <a:t>docker compose up --build</a:t>
+            </a:r>
+            <a:r>
+              <a:rPr sz="2000" b="0">
+                <a:solidFill>
+                  <a:srgbClr val="1B2738"/>
+                </a:solidFill>
+                <a:latin typeface="Segoe UI"/>
+              </a:rPr>
+              <a:t> → </a:t>
+            </a:r>
+            <a:r>
+              <a:rPr sz="1900" b="0">
+                <a:solidFill>
+                  <a:srgbClr val="E8590C"/>
+                </a:solidFill>
+                <a:latin typeface="Consolas"/>
+              </a:rPr>
+              <a:t>http://localhost:8000</a:t>
             </a:r>
           </a:p>
           <a:p>
@@ -13788,7 +13781,7 @@
                 </a:solidFill>
                 <a:latin typeface="Segoe UI"/>
               </a:rPr>
-              <a:t>Запуск демо одной командой: </a:t>
+              <a:t>В проекте: </a:t>
             </a:r>
             <a:r>
               <a:rPr sz="1900" b="0">
@@ -13797,7 +13790,7 @@
                 </a:solidFill>
                 <a:latin typeface="Consolas"/>
               </a:rPr>
-              <a:t>docker compose up --build</a:t>
+              <a:t>docs/architecture.md</a:t>
             </a:r>
             <a:r>
               <a:rPr sz="2000" b="0">
@@ -13806,7 +13799,7 @@
                 </a:solidFill>
                 <a:latin typeface="Segoe UI"/>
               </a:rPr>
-              <a:t> → </a:t>
+              <a:t> (решения и альтернативы), </a:t>
             </a:r>
             <a:r>
               <a:rPr sz="1900" b="0">
@@ -13815,7 +13808,52 @@
                 </a:solidFill>
                 <a:latin typeface="Consolas"/>
               </a:rPr>
-              <a:t>http://localhost:8000</a:t>
+              <a:t>docs/experiment.md</a:t>
+            </a:r>
+            <a:r>
+              <a:rPr sz="2000" b="0">
+                <a:solidFill>
+                  <a:srgbClr val="1B2738"/>
+                </a:solidFill>
+                <a:latin typeface="Segoe UI"/>
+              </a:rPr>
+              <a:t> (методика и данные), </a:t>
+            </a:r>
+            <a:r>
+              <a:rPr sz="1900" b="0">
+                <a:solidFill>
+                  <a:srgbClr val="E8590C"/>
+                </a:solidFill>
+                <a:latin typeface="Consolas"/>
+              </a:rPr>
+              <a:t>docs/conclusions.md</a:t>
+            </a:r>
+            <a:r>
+              <a:rPr sz="2000" b="0">
+                <a:solidFill>
+                  <a:srgbClr val="1B2738"/>
+                </a:solidFill>
+                <a:latin typeface="Segoe UI"/>
+              </a:rPr>
+              <a:t> (выводы), </a:t>
+            </a:r>
+            <a:r>
+              <a:rPr sz="1900" b="0">
+                <a:solidFill>
+                  <a:srgbClr val="E8590C"/>
+                </a:solidFill>
+                <a:latin typeface="Consolas"/>
+              </a:rPr>
+              <a:t>bench/results/</a:t>
+            </a:r>
+            <a:r>
+              <a:rPr sz="2000" b="0">
+                <a:solidFill>
+                  <a:srgbClr val="1B2738"/>
+                </a:solidFill>
+                <a:latin typeface="Segoe UI"/>
+              </a:rPr>
+              <a:t> (135 прогонов, графики).</a:t>
             </a:r>
           </a:p>
           <a:p>
@@ -13836,79 +13874,7 @@
                 </a:solidFill>
                 <a:latin typeface="Segoe UI"/>
               </a:rPr>
-              <a:t>В репозитории: </a:t>
-            </a:r>
-            <a:r>
-              <a:rPr sz="1900" b="0">
-                <a:solidFill>
-                  <a:srgbClr val="E8590C"/>
-                </a:solidFill>
-                <a:latin typeface="Consolas"/>
-              </a:rPr>
-              <a:t>docs/architecture.md</a:t>
-            </a:r>
-            <a:r>
-              <a:rPr sz="2000" b="0">
-                <a:solidFill>
-                  <a:srgbClr val="1B2738"/>
-                </a:solidFill>
-                <a:latin typeface="Segoe UI"/>
-              </a:rPr>
-              <a:t> (решения и альтернативы), </a:t>
-            </a:r>
-            <a:r>
-              <a:rPr sz="1900" b="0">
-                <a:solidFill>
-                  <a:srgbClr val="E8590C"/>
-                </a:solidFill>
-                <a:latin typeface="Consolas"/>
-              </a:rPr>
-              <a:t>docs/experiment.md</a:t>
-            </a:r>
-            <a:r>
-              <a:rPr sz="2000" b="0">
-                <a:solidFill>
-                  <a:srgbClr val="1B2738"/>
-                </a:solidFill>
-                <a:latin typeface="Segoe UI"/>
-              </a:rPr>
-              <a:t> (методика и данные), </a:t>
-            </a:r>
-            <a:r>
-              <a:rPr sz="1900" b="0">
-                <a:solidFill>
-                  <a:srgbClr val="E8590C"/>
-                </a:solidFill>
-                <a:latin typeface="Consolas"/>
-              </a:rPr>
-              <a:t>docs/conclusions.md</a:t>
-            </a:r>
-            <a:r>
-              <a:rPr sz="2000" b="0">
-                <a:solidFill>
-                  <a:srgbClr val="1B2738"/>
-                </a:solidFill>
-                <a:latin typeface="Segoe UI"/>
-              </a:rPr>
-              <a:t> (выводы), </a:t>
-            </a:r>
-            <a:r>
-              <a:rPr sz="1900" b="0">
-                <a:solidFill>
-                  <a:srgbClr val="E8590C"/>
-                </a:solidFill>
-                <a:latin typeface="Consolas"/>
-              </a:rPr>
-              <a:t>bench/results/</a:t>
-            </a:r>
-            <a:r>
-              <a:rPr sz="2000" b="0">
-                <a:solidFill>
-                  <a:srgbClr val="1B2738"/>
-                </a:solidFill>
-                <a:latin typeface="Segoe UI"/>
-              </a:rPr>
-              <a:t> (135 прогонов, графики).</a:t>
+              <a:t>Код, документы и обе презентации — в репозитории проекта, ссылку пришлю отдельно.</a:t>
             </a:r>
           </a:p>
         </p:txBody>
